--- a/data/reports/2026-W38.pptx
+++ b/data/reports/2026-W38.pptx
@@ -11,6 +11,7 @@
     <p:sldId id="259" r:id="rId10"/>
     <p:sldId id="260" r:id="rId11"/>
     <p:sldId id="261" r:id="rId12"/>
+    <p:sldId id="262" r:id="rId13"/>
   </p:sldIdLst>
   <p:sldSz cx="12191695" cy="6858000" type="screen4x3"/>
   <p:notesSz cx="6858000" cy="9144000"/>
@@ -3447,7 +3448,7 @@
         <p:spPr>
           <a:xfrm>
             <a:off x="868680" y="1600200"/>
-            <a:ext cx="10698480" cy="877824"/>
+            <a:ext cx="10698480" cy="1115568"/>
           </a:xfrm>
           <a:prstGeom prst="rect">
             <a:avLst/>
@@ -3472,7 +3473,7 @@
                 </a:solidFill>
                 <a:latin typeface="Arial"/>
               </a:rPr>
-              <a:t>這週投影機產業聚焦於B端市場跨界應用與上游供應鏈轉變。極米科技以高穩定性開拓文化展演市場，Epson大型雷射投影機則將歌劇字幕轉化為動態舞台藝術；同時，矽光子技術的光學模組生產瓶頸正向上游雷射級基板供應轉移，突顯上游原材料的關鍵地位。</a:t>
+              <a:t>這週投影機產業聚焦於高階應用與供應鏈轉型，其中極米科技於成都雙年展達成 196 天零故障，成功展現消費品牌跨足 B 端文化展演市場的潛力。同時，上游矽光子光學模組的生產瓶頸已自元件製造端向上游雷射級基板供應轉移，而各大品牌如當貝、科視與 soundcore Nebula 也紛紛發表高階雷射投影與智慧投影新品，持續拓展多元應用場景。</a:t>
             </a:r>
           </a:p>
         </p:txBody>
@@ -3610,27 +3611,23 @@
       </p:sp>
       <p:sp>
         <p:nvSpPr>
-          <p:cNvPr id="4" name="Rounded Rectangle 3"/>
+          <p:cNvPr id="4" name="Oval 3"/>
           <p:cNvSpPr/>
           <p:nvPr/>
         </p:nvSpPr>
         <p:spPr>
           <a:xfrm>
-            <a:off x="548640" y="1600200"/>
-            <a:ext cx="3545738" cy="4754880"/>
-          </a:xfrm>
-          <a:prstGeom prst="roundRect">
-            <a:avLst>
-              <a:gd name="adj" fmla="val 6000"/>
-            </a:avLst>
+            <a:off x="594360" y="1728216"/>
+            <a:ext cx="100584" cy="100584"/>
+          </a:xfrm>
+          <a:prstGeom prst="ellipse">
+            <a:avLst/>
           </a:prstGeom>
           <a:solidFill>
-            <a:srgbClr val="23262F"/>
+            <a:srgbClr val="4C7EFF"/>
           </a:solidFill>
-          <a:ln w="12700">
-            <a:solidFill>
-              <a:srgbClr val="4C7EFF"/>
-            </a:solidFill>
+          <a:ln>
+            <a:noFill/>
           </a:ln>
           <a:effectLst/>
         </p:spPr>
@@ -3664,43 +3661,8 @@
         </p:nvSpPr>
         <p:spPr>
           <a:xfrm>
-            <a:off x="749808" y="1764792"/>
-            <a:ext cx="3143402" cy="457200"/>
-          </a:xfrm>
-          <a:prstGeom prst="rect">
-            <a:avLst/>
-          </a:prstGeom>
-          <a:noFill/>
-        </p:spPr>
-        <p:txBody>
-          <a:bodyPr wrap="square" anchor="t">
-            <a:spAutoFit/>
-          </a:bodyPr>
-          <a:lstStyle/>
-          <a:p>
-            <a:pPr algn="l"/>
-            <a:r>
-              <a:rPr sz="1450" b="1">
-                <a:solidFill>
-                  <a:srgbClr val="4C7EFF"/>
-                </a:solidFill>
-                <a:latin typeface="Arial"/>
-              </a:rPr>
-              <a:t>消費品牌跨足藝文展演</a:t>
-            </a:r>
-          </a:p>
-        </p:txBody>
-      </p:sp>
-      <p:sp>
-        <p:nvSpPr>
-          <p:cNvPr id="6" name="TextBox 5"/>
-          <p:cNvSpPr txBox="1"/>
-          <p:nvPr/>
-        </p:nvSpPr>
-        <p:spPr>
-          <a:xfrm>
-            <a:off x="749808" y="2258568"/>
-            <a:ext cx="3143402" cy="3931920"/>
+            <a:off x="868680" y="1600200"/>
+            <a:ext cx="10698480" cy="640080"/>
           </a:xfrm>
           <a:prstGeom prst="rect">
             <a:avLst/>
@@ -3715,44 +3677,49 @@
           <a:p>
             <a:pPr>
               <a:lnSpc>
-                <a:spcPct val="120000"/>
+                <a:spcPct val="115000"/>
               </a:lnSpc>
             </a:pPr>
             <a:r>
-              <a:rPr sz="1150">
-                <a:solidFill>
-                  <a:srgbClr val="F5F3EC"/>
+              <a:rPr sz="1450" b="1">
+                <a:solidFill>
+                  <a:srgbClr val="FFB454"/>
                 </a:solidFill>
                 <a:latin typeface="Arial"/>
               </a:rPr>
-              <a:t>極米科技70台投影設備在成都雙年展196天展期中達成零故障運行，獲成都市美術館感謝函，成功開闢客廳以外的B端文化藝術場景（投影時代）。</a:t>
-            </a:r>
-          </a:p>
-        </p:txBody>
-      </p:sp>
-      <p:sp>
-        <p:nvSpPr>
-          <p:cNvPr id="7" name="Rounded Rectangle 6"/>
+              <a:t>消費品牌跨足 B 端展演</a:t>
+            </a:r>
+            <a:r>
+              <a:rPr sz="1450">
+                <a:solidFill>
+                  <a:srgbClr val="F5F3EC"/>
+                </a:solidFill>
+                <a:latin typeface="Arial"/>
+              </a:rPr>
+              <a:t>：極米科技 70 台投影設備在成都雙年展 196 天展期中達成零故障運行，獲成都市美術館感謝函，開闢客廳以外的 B 端業務戰場（投影時代）。</a:t>
+            </a:r>
+          </a:p>
+        </p:txBody>
+      </p:sp>
+      <p:sp>
+        <p:nvSpPr>
+          <p:cNvPr id="6" name="Oval 5"/>
           <p:cNvSpPr/>
           <p:nvPr/>
         </p:nvSpPr>
         <p:spPr>
           <a:xfrm>
-            <a:off x="4322978" y="1600200"/>
-            <a:ext cx="3545738" cy="4754880"/>
-          </a:xfrm>
-          <a:prstGeom prst="roundRect">
-            <a:avLst>
-              <a:gd name="adj" fmla="val 6000"/>
-            </a:avLst>
+            <a:off x="594360" y="2368296"/>
+            <a:ext cx="100584" cy="100584"/>
+          </a:xfrm>
+          <a:prstGeom prst="ellipse">
+            <a:avLst/>
           </a:prstGeom>
           <a:solidFill>
-            <a:srgbClr val="23262F"/>
+            <a:srgbClr val="4C7EFF"/>
           </a:solidFill>
-          <a:ln w="12700">
-            <a:solidFill>
-              <a:srgbClr val="FFB454"/>
-            </a:solidFill>
+          <a:ln>
+            <a:noFill/>
           </a:ln>
           <a:effectLst/>
         </p:spPr>
@@ -3780,49 +3747,14 @@
       </p:sp>
       <p:sp>
         <p:nvSpPr>
-          <p:cNvPr id="8" name="TextBox 7"/>
+          <p:cNvPr id="7" name="TextBox 6"/>
           <p:cNvSpPr txBox="1"/>
           <p:nvPr/>
         </p:nvSpPr>
         <p:spPr>
           <a:xfrm>
-            <a:off x="4524146" y="1764792"/>
-            <a:ext cx="3143402" cy="457200"/>
-          </a:xfrm>
-          <a:prstGeom prst="rect">
-            <a:avLst/>
-          </a:prstGeom>
-          <a:noFill/>
-        </p:spPr>
-        <p:txBody>
-          <a:bodyPr wrap="square" anchor="t">
-            <a:spAutoFit/>
-          </a:bodyPr>
-          <a:lstStyle/>
-          <a:p>
-            <a:pPr algn="l"/>
-            <a:r>
-              <a:rPr sz="1450" b="1">
-                <a:solidFill>
-                  <a:srgbClr val="FFB454"/>
-                </a:solidFill>
-                <a:latin typeface="Arial"/>
-              </a:rPr>
-              <a:t>高階與智慧投影新品齊發</a:t>
-            </a:r>
-          </a:p>
-        </p:txBody>
-      </p:sp>
-      <p:sp>
-        <p:nvSpPr>
-          <p:cNvPr id="9" name="TextBox 8"/>
-          <p:cNvSpPr txBox="1"/>
-          <p:nvPr/>
-        </p:nvSpPr>
-        <p:spPr>
-          <a:xfrm>
-            <a:off x="4524146" y="2258568"/>
-            <a:ext cx="3143402" cy="3931920"/>
+            <a:off x="868680" y="2240280"/>
+            <a:ext cx="10698480" cy="402336"/>
           </a:xfrm>
           <a:prstGeom prst="rect">
             <a:avLst/>
@@ -3837,44 +3769,49 @@
           <a:p>
             <a:pPr>
               <a:lnSpc>
-                <a:spcPct val="120000"/>
+                <a:spcPct val="115000"/>
               </a:lnSpc>
             </a:pPr>
             <a:r>
-              <a:rPr sz="1150">
-                <a:solidFill>
-                  <a:srgbClr val="F5F3EC"/>
+              <a:rPr sz="1450" b="1">
+                <a:solidFill>
+                  <a:srgbClr val="FFB454"/>
                 </a:solidFill>
                 <a:latin typeface="Arial"/>
               </a:rPr>
-              <a:t>当贝發表 X9 Max（支援 4800 CVIA 亮度、QuaLas42 激光器與 MT9681 晶片）；soundcore Nebula 推出 X1S 智慧投影機（4K 解析度、6000 流明 RGB 雷射光源）；堅果推出業界首款 360 度全景智能投影儀 MIGO；騰訊則上架極光投影儀 F5（IT之家、ProjectorReviews）。</a:t>
-            </a:r>
-          </a:p>
-        </p:txBody>
-      </p:sp>
-      <p:sp>
-        <p:nvSpPr>
-          <p:cNvPr id="10" name="Rounded Rectangle 9"/>
+              <a:t>高階智慧與雷射新品亮相</a:t>
+            </a:r>
+            <a:r>
+              <a:rPr sz="1450">
+                <a:solidFill>
+                  <a:srgbClr val="F5F3EC"/>
+                </a:solidFill>
+                <a:latin typeface="Arial"/>
+              </a:rPr>
+              <a:t>：</a:t>
+            </a:r>
+          </a:p>
+        </p:txBody>
+      </p:sp>
+      <p:sp>
+        <p:nvSpPr>
+          <p:cNvPr id="8" name="Oval 7"/>
           <p:cNvSpPr/>
           <p:nvPr/>
         </p:nvSpPr>
         <p:spPr>
           <a:xfrm>
-            <a:off x="8097316" y="1600200"/>
-            <a:ext cx="3545738" cy="4754880"/>
-          </a:xfrm>
-          <a:prstGeom prst="roundRect">
-            <a:avLst>
-              <a:gd name="adj" fmla="val 6000"/>
-            </a:avLst>
+            <a:off x="594360" y="2770632"/>
+            <a:ext cx="100584" cy="100584"/>
+          </a:xfrm>
+          <a:prstGeom prst="ellipse">
+            <a:avLst/>
           </a:prstGeom>
           <a:solidFill>
-            <a:srgbClr val="23262F"/>
+            <a:srgbClr val="4C7EFF"/>
           </a:solidFill>
-          <a:ln w="12700">
-            <a:solidFill>
-              <a:srgbClr val="8B7FD6"/>
-            </a:solidFill>
+          <a:ln>
+            <a:noFill/>
           </a:ln>
           <a:effectLst/>
         </p:spPr>
@@ -3902,49 +3839,97 @@
       </p:sp>
       <p:sp>
         <p:nvSpPr>
+          <p:cNvPr id="9" name="TextBox 8"/>
+          <p:cNvSpPr txBox="1"/>
+          <p:nvPr/>
+        </p:nvSpPr>
+        <p:spPr>
+          <a:xfrm>
+            <a:off x="868680" y="2642616"/>
+            <a:ext cx="10698480" cy="640080"/>
+          </a:xfrm>
+          <a:prstGeom prst="rect">
+            <a:avLst/>
+          </a:prstGeom>
+          <a:noFill/>
+        </p:spPr>
+        <p:txBody>
+          <a:bodyPr wrap="square">
+            <a:spAutoFit/>
+          </a:bodyPr>
+          <a:lstStyle/>
+          <a:p>
+            <a:pPr>
+              <a:lnSpc>
+                <a:spcPct val="115000"/>
+              </a:lnSpc>
+            </a:pPr>
+            <a:r>
+              <a:rPr sz="1450">
+                <a:solidFill>
+                  <a:srgbClr val="F5F3EC"/>
+                </a:solidFill>
+                <a:latin typeface="Arial"/>
+              </a:rPr>
+              <a:t>当贝發布 X9 Max 投影儀，主打 4800 CVIA 亮度、80000:1 動態對比度、QuaLas42 激光器與 MT9681 晶片（IT之家）。</a:t>
+            </a:r>
+          </a:p>
+        </p:txBody>
+      </p:sp>
+      <p:sp>
+        <p:nvSpPr>
+          <p:cNvPr id="10" name="Oval 9"/>
+          <p:cNvSpPr/>
+          <p:nvPr/>
+        </p:nvSpPr>
+        <p:spPr>
+          <a:xfrm>
+            <a:off x="594360" y="3410712"/>
+            <a:ext cx="100584" cy="100584"/>
+          </a:xfrm>
+          <a:prstGeom prst="ellipse">
+            <a:avLst/>
+          </a:prstGeom>
+          <a:solidFill>
+            <a:srgbClr val="4C7EFF"/>
+          </a:solidFill>
+          <a:ln>
+            <a:noFill/>
+          </a:ln>
+          <a:effectLst/>
+        </p:spPr>
+        <p:style>
+          <a:lnRef idx="1">
+            <a:schemeClr val="accent1"/>
+          </a:lnRef>
+          <a:fillRef idx="3">
+            <a:schemeClr val="accent1"/>
+          </a:fillRef>
+          <a:effectRef idx="2">
+            <a:schemeClr val="accent1"/>
+          </a:effectRef>
+          <a:fontRef idx="minor">
+            <a:schemeClr val="lt1"/>
+          </a:fontRef>
+        </p:style>
+        <p:txBody>
+          <a:bodyPr rtlCol="0" anchor="ctr"/>
+          <a:lstStyle/>
+          <a:p>
+            <a:pPr algn="ctr"/>
+          </a:p>
+        </p:txBody>
+      </p:sp>
+      <p:sp>
+        <p:nvSpPr>
           <p:cNvPr id="11" name="TextBox 10"/>
           <p:cNvSpPr txBox="1"/>
           <p:nvPr/>
         </p:nvSpPr>
         <p:spPr>
           <a:xfrm>
-            <a:off x="8298484" y="1764792"/>
-            <a:ext cx="3143402" cy="457200"/>
-          </a:xfrm>
-          <a:prstGeom prst="rect">
-            <a:avLst/>
-          </a:prstGeom>
-          <a:noFill/>
-        </p:spPr>
-        <p:txBody>
-          <a:bodyPr wrap="square" anchor="t">
-            <a:spAutoFit/>
-          </a:bodyPr>
-          <a:lstStyle/>
-          <a:p>
-            <a:pPr algn="l"/>
-            <a:r>
-              <a:rPr sz="1450" b="1">
-                <a:solidFill>
-                  <a:srgbClr val="8B7FD6"/>
-                </a:solidFill>
-                <a:latin typeface="Arial"/>
-              </a:rPr>
-              <a:t>展會與空間升級</a:t>
-            </a:r>
-          </a:p>
-        </p:txBody>
-      </p:sp>
-      <p:sp>
-        <p:nvSpPr>
-          <p:cNvPr id="12" name="TextBox 11"/>
-          <p:cNvSpPr txBox="1"/>
-          <p:nvPr/>
-        </p:nvSpPr>
-        <p:spPr>
-          <a:xfrm>
-            <a:off x="8298484" y="2258568"/>
-            <a:ext cx="3143402" cy="3931920"/>
+            <a:off x="868680" y="3282696"/>
+            <a:ext cx="10698480" cy="640080"/>
           </a:xfrm>
           <a:prstGeom prst="rect">
             <a:avLst/>
@@ -3959,24 +3944,365 @@
           <a:p>
             <a:pPr>
               <a:lnSpc>
-                <a:spcPct val="120000"/>
+                <a:spcPct val="115000"/>
               </a:lnSpc>
             </a:pPr>
             <a:r>
-              <a:rPr sz="1150">
+              <a:rPr sz="1450">
                 <a:solidFill>
                   <a:srgbClr val="F5F3EC"/>
                 </a:solidFill>
                 <a:latin typeface="Arial"/>
               </a:rPr>
-              <a:t>CEDIA Expo 2026 展出前沿投影產品與投影幕技術；科視 Christie 上海演示室完成全面升級，展出 Eclipse G3 等高階純雷射投影系統；印度詞語博物館則採用 16 台科視雷射投影機打造互動體驗（ProjectorCentral、投影時代）。</a:t>
-            </a:r>
+              <a:t>soundcore Nebula 推出 X1S 智慧投影機，搭載 4K 解析度與 6000 流明 RGB 雷射光源，建議售價 2499 美元起（ProjectorReviews）。</a:t>
+            </a:r>
+          </a:p>
+        </p:txBody>
+      </p:sp>
+      <p:sp>
+        <p:nvSpPr>
+          <p:cNvPr id="12" name="Oval 11"/>
+          <p:cNvSpPr/>
+          <p:nvPr/>
+        </p:nvSpPr>
+        <p:spPr>
+          <a:xfrm>
+            <a:off x="594360" y="4050792"/>
+            <a:ext cx="100584" cy="100584"/>
+          </a:xfrm>
+          <a:prstGeom prst="ellipse">
+            <a:avLst/>
+          </a:prstGeom>
+          <a:solidFill>
+            <a:srgbClr val="4C7EFF"/>
+          </a:solidFill>
+          <a:ln>
+            <a:noFill/>
+          </a:ln>
+          <a:effectLst/>
+        </p:spPr>
+        <p:style>
+          <a:lnRef idx="1">
+            <a:schemeClr val="accent1"/>
+          </a:lnRef>
+          <a:fillRef idx="3">
+            <a:schemeClr val="accent1"/>
+          </a:fillRef>
+          <a:effectRef idx="2">
+            <a:schemeClr val="accent1"/>
+          </a:effectRef>
+          <a:fontRef idx="minor">
+            <a:schemeClr val="lt1"/>
+          </a:fontRef>
+        </p:style>
+        <p:txBody>
+          <a:bodyPr rtlCol="0" anchor="ctr"/>
+          <a:lstStyle/>
+          <a:p>
+            <a:pPr algn="ctr"/>
           </a:p>
         </p:txBody>
       </p:sp>
       <p:sp>
         <p:nvSpPr>
           <p:cNvPr id="13" name="TextBox 12"/>
+          <p:cNvSpPr txBox="1"/>
+          <p:nvPr/>
+        </p:nvSpPr>
+        <p:spPr>
+          <a:xfrm>
+            <a:off x="868680" y="3922776"/>
+            <a:ext cx="10698480" cy="640080"/>
+          </a:xfrm>
+          <a:prstGeom prst="rect">
+            <a:avLst/>
+          </a:prstGeom>
+          <a:noFill/>
+        </p:spPr>
+        <p:txBody>
+          <a:bodyPr wrap="square">
+            <a:spAutoFit/>
+          </a:bodyPr>
+          <a:lstStyle/>
+          <a:p>
+            <a:pPr>
+              <a:lnSpc>
+                <a:spcPct val="115000"/>
+              </a:lnSpc>
+            </a:pPr>
+            <a:r>
+              <a:rPr sz="1450">
+                <a:solidFill>
+                  <a:srgbClr val="F5F3EC"/>
+                </a:solidFill>
+                <a:latin typeface="Arial"/>
+              </a:rPr>
+              <a:t>堅果發布首款 360 度全景智能投影儀 MIGO，具備 750 CVIA 亮度與 DLP 顯示技術，國補到手價 1599.3 元（IT之家）。</a:t>
+            </a:r>
+          </a:p>
+        </p:txBody>
+      </p:sp>
+      <p:sp>
+        <p:nvSpPr>
+          <p:cNvPr id="14" name="Oval 13"/>
+          <p:cNvSpPr/>
+          <p:nvPr/>
+        </p:nvSpPr>
+        <p:spPr>
+          <a:xfrm>
+            <a:off x="594360" y="4690872"/>
+            <a:ext cx="100584" cy="100584"/>
+          </a:xfrm>
+          <a:prstGeom prst="ellipse">
+            <a:avLst/>
+          </a:prstGeom>
+          <a:solidFill>
+            <a:srgbClr val="4C7EFF"/>
+          </a:solidFill>
+          <a:ln>
+            <a:noFill/>
+          </a:ln>
+          <a:effectLst/>
+        </p:spPr>
+        <p:style>
+          <a:lnRef idx="1">
+            <a:schemeClr val="accent1"/>
+          </a:lnRef>
+          <a:fillRef idx="3">
+            <a:schemeClr val="accent1"/>
+          </a:fillRef>
+          <a:effectRef idx="2">
+            <a:schemeClr val="accent1"/>
+          </a:effectRef>
+          <a:fontRef idx="minor">
+            <a:schemeClr val="lt1"/>
+          </a:fontRef>
+        </p:style>
+        <p:txBody>
+          <a:bodyPr rtlCol="0" anchor="ctr"/>
+          <a:lstStyle/>
+          <a:p>
+            <a:pPr algn="ctr"/>
+          </a:p>
+        </p:txBody>
+      </p:sp>
+      <p:sp>
+        <p:nvSpPr>
+          <p:cNvPr id="15" name="TextBox 14"/>
+          <p:cNvSpPr txBox="1"/>
+          <p:nvPr/>
+        </p:nvSpPr>
+        <p:spPr>
+          <a:xfrm>
+            <a:off x="868680" y="4562856"/>
+            <a:ext cx="10698480" cy="640080"/>
+          </a:xfrm>
+          <a:prstGeom prst="rect">
+            <a:avLst/>
+          </a:prstGeom>
+          <a:noFill/>
+        </p:spPr>
+        <p:txBody>
+          <a:bodyPr wrap="square">
+            <a:spAutoFit/>
+          </a:bodyPr>
+          <a:lstStyle/>
+          <a:p>
+            <a:pPr>
+              <a:lnSpc>
+                <a:spcPct val="115000"/>
+              </a:lnSpc>
+            </a:pPr>
+            <a:r>
+              <a:rPr sz="1450">
+                <a:solidFill>
+                  <a:srgbClr val="F5F3EC"/>
+                </a:solidFill>
+                <a:latin typeface="Arial"/>
+              </a:rPr>
+              <a:t>騰訊上架極光投影儀 F5，主打 1080P 解析度與 345CVIA 流明，售價 822 元人民幣起（IT之家）。</a:t>
+            </a:r>
+          </a:p>
+        </p:txBody>
+      </p:sp>
+      <p:sp>
+        <p:nvSpPr>
+          <p:cNvPr id="16" name="Oval 15"/>
+          <p:cNvSpPr/>
+          <p:nvPr/>
+        </p:nvSpPr>
+        <p:spPr>
+          <a:xfrm>
+            <a:off x="594360" y="5330952"/>
+            <a:ext cx="100584" cy="100584"/>
+          </a:xfrm>
+          <a:prstGeom prst="ellipse">
+            <a:avLst/>
+          </a:prstGeom>
+          <a:solidFill>
+            <a:srgbClr val="4C7EFF"/>
+          </a:solidFill>
+          <a:ln>
+            <a:noFill/>
+          </a:ln>
+          <a:effectLst/>
+        </p:spPr>
+        <p:style>
+          <a:lnRef idx="1">
+            <a:schemeClr val="accent1"/>
+          </a:lnRef>
+          <a:fillRef idx="3">
+            <a:schemeClr val="accent1"/>
+          </a:fillRef>
+          <a:effectRef idx="2">
+            <a:schemeClr val="accent1"/>
+          </a:effectRef>
+          <a:fontRef idx="minor">
+            <a:schemeClr val="lt1"/>
+          </a:fontRef>
+        </p:style>
+        <p:txBody>
+          <a:bodyPr rtlCol="0" anchor="ctr"/>
+          <a:lstStyle/>
+          <a:p>
+            <a:pPr algn="ctr"/>
+          </a:p>
+        </p:txBody>
+      </p:sp>
+      <p:sp>
+        <p:nvSpPr>
+          <p:cNvPr id="17" name="TextBox 16"/>
+          <p:cNvSpPr txBox="1"/>
+          <p:nvPr/>
+        </p:nvSpPr>
+        <p:spPr>
+          <a:xfrm>
+            <a:off x="868680" y="5202936"/>
+            <a:ext cx="10698480" cy="402336"/>
+          </a:xfrm>
+          <a:prstGeom prst="rect">
+            <a:avLst/>
+          </a:prstGeom>
+          <a:noFill/>
+        </p:spPr>
+        <p:txBody>
+          <a:bodyPr wrap="square">
+            <a:spAutoFit/>
+          </a:bodyPr>
+          <a:lstStyle/>
+          <a:p>
+            <a:pPr>
+              <a:lnSpc>
+                <a:spcPct val="115000"/>
+              </a:lnSpc>
+            </a:pPr>
+            <a:r>
+              <a:rPr sz="1450" b="1">
+                <a:solidFill>
+                  <a:srgbClr val="FFB454"/>
+                </a:solidFill>
+                <a:latin typeface="Arial"/>
+              </a:rPr>
+              <a:t>展館與專業空間升級</a:t>
+            </a:r>
+            <a:r>
+              <a:rPr sz="1450">
+                <a:solidFill>
+                  <a:srgbClr val="F5F3EC"/>
+                </a:solidFill>
+                <a:latin typeface="Arial"/>
+              </a:rPr>
+              <a:t>：</a:t>
+            </a:r>
+          </a:p>
+        </p:txBody>
+      </p:sp>
+      <p:sp>
+        <p:nvSpPr>
+          <p:cNvPr id="18" name="Oval 17"/>
+          <p:cNvSpPr/>
+          <p:nvPr/>
+        </p:nvSpPr>
+        <p:spPr>
+          <a:xfrm>
+            <a:off x="594360" y="5733288"/>
+            <a:ext cx="100584" cy="100584"/>
+          </a:xfrm>
+          <a:prstGeom prst="ellipse">
+            <a:avLst/>
+          </a:prstGeom>
+          <a:solidFill>
+            <a:srgbClr val="4C7EFF"/>
+          </a:solidFill>
+          <a:ln>
+            <a:noFill/>
+          </a:ln>
+          <a:effectLst/>
+        </p:spPr>
+        <p:style>
+          <a:lnRef idx="1">
+            <a:schemeClr val="accent1"/>
+          </a:lnRef>
+          <a:fillRef idx="3">
+            <a:schemeClr val="accent1"/>
+          </a:fillRef>
+          <a:effectRef idx="2">
+            <a:schemeClr val="accent1"/>
+          </a:effectRef>
+          <a:fontRef idx="minor">
+            <a:schemeClr val="lt1"/>
+          </a:fontRef>
+        </p:style>
+        <p:txBody>
+          <a:bodyPr rtlCol="0" anchor="ctr"/>
+          <a:lstStyle/>
+          <a:p>
+            <a:pPr algn="ctr"/>
+          </a:p>
+        </p:txBody>
+      </p:sp>
+      <p:sp>
+        <p:nvSpPr>
+          <p:cNvPr id="19" name="TextBox 18"/>
+          <p:cNvSpPr txBox="1"/>
+          <p:nvPr/>
+        </p:nvSpPr>
+        <p:spPr>
+          <a:xfrm>
+            <a:off x="868680" y="5605272"/>
+            <a:ext cx="10698480" cy="640080"/>
+          </a:xfrm>
+          <a:prstGeom prst="rect">
+            <a:avLst/>
+          </a:prstGeom>
+          <a:noFill/>
+        </p:spPr>
+        <p:txBody>
+          <a:bodyPr wrap="square">
+            <a:spAutoFit/>
+          </a:bodyPr>
+          <a:lstStyle/>
+          <a:p>
+            <a:pPr>
+              <a:lnSpc>
+                <a:spcPct val="115000"/>
+              </a:lnSpc>
+            </a:pPr>
+            <a:r>
+              <a:rPr sz="1450">
+                <a:solidFill>
+                  <a:srgbClr val="F5F3EC"/>
+                </a:solidFill>
+                <a:latin typeface="Arial"/>
+              </a:rPr>
+              <a:t>科視 Christie 上海辦公室 3000 平米演示室完成升級，展出 Eclipse G3、Griffyn 與 M4K 系列等高階純雷射投影機（投影時代、投影時代）。</a:t>
+            </a:r>
+          </a:p>
+        </p:txBody>
+      </p:sp>
+      <p:sp>
+        <p:nvSpPr>
+          <p:cNvPr id="20" name="TextBox 19"/>
           <p:cNvSpPr txBox="1"/>
           <p:nvPr/>
         </p:nvSpPr>
@@ -4065,7 +4391,7 @@
                 </a:solidFill>
                 <a:latin typeface="Arial"/>
               </a:rPr>
-              <a:t>04 · SECTION　🔧</a:t>
+              <a:t>04 · SECTION　✨</a:t>
             </a:r>
           </a:p>
         </p:txBody>
@@ -4100,34 +4426,30 @@
                 </a:solidFill>
                 <a:latin typeface="Arial"/>
               </a:rPr>
-              <a:t>技術與供應鏈</a:t>
-            </a:r>
-          </a:p>
-        </p:txBody>
-      </p:sp>
-      <p:sp>
-        <p:nvSpPr>
-          <p:cNvPr id="4" name="Rounded Rectangle 3"/>
+              <a:t>市場與品牌動態</a:t>
+            </a:r>
+          </a:p>
+        </p:txBody>
+      </p:sp>
+      <p:sp>
+        <p:nvSpPr>
+          <p:cNvPr id="4" name="Oval 3"/>
           <p:cNvSpPr/>
           <p:nvPr/>
         </p:nvSpPr>
         <p:spPr>
           <a:xfrm>
-            <a:off x="548640" y="1600200"/>
-            <a:ext cx="11094415" cy="4754880"/>
-          </a:xfrm>
-          <a:prstGeom prst="roundRect">
-            <a:avLst>
-              <a:gd name="adj" fmla="val 6000"/>
-            </a:avLst>
+            <a:off x="594360" y="1728216"/>
+            <a:ext cx="100584" cy="100584"/>
+          </a:xfrm>
+          <a:prstGeom prst="ellipse">
+            <a:avLst/>
           </a:prstGeom>
           <a:solidFill>
-            <a:srgbClr val="23262F"/>
+            <a:srgbClr val="4C7EFF"/>
           </a:solidFill>
-          <a:ln w="12700">
-            <a:solidFill>
-              <a:srgbClr val="4C7EFF"/>
-            </a:solidFill>
+          <a:ln>
+            <a:noFill/>
           </a:ln>
           <a:effectLst/>
         </p:spPr>
@@ -4161,43 +4483,8 @@
         </p:nvSpPr>
         <p:spPr>
           <a:xfrm>
-            <a:off x="749808" y="1764792"/>
-            <a:ext cx="10692079" cy="457200"/>
-          </a:xfrm>
-          <a:prstGeom prst="rect">
-            <a:avLst/>
-          </a:prstGeom>
-          <a:noFill/>
-        </p:spPr>
-        <p:txBody>
-          <a:bodyPr wrap="square" anchor="t">
-            <a:spAutoFit/>
-          </a:bodyPr>
-          <a:lstStyle/>
-          <a:p>
-            <a:pPr algn="l"/>
-            <a:r>
-              <a:rPr sz="1450" b="1">
-                <a:solidFill>
-                  <a:srgbClr val="4C7EFF"/>
-                </a:solidFill>
-                <a:latin typeface="Arial"/>
-              </a:rPr>
-              <a:t>矽光子與光學互連</a:t>
-            </a:r>
-          </a:p>
-        </p:txBody>
-      </p:sp>
-      <p:sp>
-        <p:nvSpPr>
-          <p:cNvPr id="6" name="TextBox 5"/>
-          <p:cNvSpPr txBox="1"/>
-          <p:nvPr/>
-        </p:nvSpPr>
-        <p:spPr>
-          <a:xfrm>
-            <a:off x="749808" y="2258568"/>
-            <a:ext cx="10692079" cy="3931920"/>
+            <a:off x="868680" y="1600200"/>
+            <a:ext cx="10698480" cy="640080"/>
           </a:xfrm>
           <a:prstGeom prst="rect">
             <a:avLst/>
@@ -4212,24 +4499,107 @@
           <a:p>
             <a:pPr>
               <a:lnSpc>
-                <a:spcPct val="120000"/>
+                <a:spcPct val="115000"/>
               </a:lnSpc>
             </a:pPr>
             <a:r>
-              <a:rPr sz="1150">
+              <a:rPr sz="1450">
                 <a:solidFill>
                   <a:srgbClr val="F5F3EC"/>
                 </a:solidFill>
                 <a:latin typeface="Arial"/>
               </a:rPr>
-              <a:t>矽光子技術發展下，光學模組的生產瓶頸已從下游元件製造端向上游雷射級基板供應轉移。同時，隨著 AI 競賽重心轉向資料傳輸與連接技術，鴻騰精密正積極擴大光學互連產品的研發與佈局（DigiTimes）。</a:t>
-            </a:r>
+              <a:t>印度加爾各答詞語博物館採用 16 台科視雷射投影機（包含 Captiva 超短焦與 Inspire 系列 1DLP 機型）打造互動視覺體驗（投影時代）。</a:t>
+            </a:r>
+          </a:p>
+        </p:txBody>
+      </p:sp>
+      <p:sp>
+        <p:nvSpPr>
+          <p:cNvPr id="6" name="Oval 5"/>
+          <p:cNvSpPr/>
+          <p:nvPr/>
+        </p:nvSpPr>
+        <p:spPr>
+          <a:xfrm>
+            <a:off x="594360" y="2368296"/>
+            <a:ext cx="100584" cy="100584"/>
+          </a:xfrm>
+          <a:prstGeom prst="ellipse">
+            <a:avLst/>
+          </a:prstGeom>
+          <a:solidFill>
+            <a:srgbClr val="4C7EFF"/>
+          </a:solidFill>
+          <a:ln>
+            <a:noFill/>
+          </a:ln>
+          <a:effectLst/>
+        </p:spPr>
+        <p:style>
+          <a:lnRef idx="1">
+            <a:schemeClr val="accent1"/>
+          </a:lnRef>
+          <a:fillRef idx="3">
+            <a:schemeClr val="accent1"/>
+          </a:fillRef>
+          <a:effectRef idx="2">
+            <a:schemeClr val="accent1"/>
+          </a:effectRef>
+          <a:fontRef idx="minor">
+            <a:schemeClr val="lt1"/>
+          </a:fontRef>
+        </p:style>
+        <p:txBody>
+          <a:bodyPr rtlCol="0" anchor="ctr"/>
+          <a:lstStyle/>
+          <a:p>
+            <a:pPr algn="ctr"/>
           </a:p>
         </p:txBody>
       </p:sp>
       <p:sp>
         <p:nvSpPr>
           <p:cNvPr id="7" name="TextBox 6"/>
+          <p:cNvSpPr txBox="1"/>
+          <p:nvPr/>
+        </p:nvSpPr>
+        <p:spPr>
+          <a:xfrm>
+            <a:off x="868680" y="2240280"/>
+            <a:ext cx="10698480" cy="640080"/>
+          </a:xfrm>
+          <a:prstGeom prst="rect">
+            <a:avLst/>
+          </a:prstGeom>
+          <a:noFill/>
+        </p:spPr>
+        <p:txBody>
+          <a:bodyPr wrap="square">
+            <a:spAutoFit/>
+          </a:bodyPr>
+          <a:lstStyle/>
+          <a:p>
+            <a:pPr>
+              <a:lnSpc>
+                <a:spcPct val="115000"/>
+              </a:lnSpc>
+            </a:pPr>
+            <a:r>
+              <a:rPr sz="1450">
+                <a:solidFill>
+                  <a:srgbClr val="F5F3EC"/>
+                </a:solidFill>
+                <a:latin typeface="Arial"/>
+              </a:rPr>
+              <a:t>波士頓歌劇院攜手 MASARY工作室，採用 Epson 大型場館 4K 雷射投影機將字幕轉化為動態舞台藝術（Epson官方）。</a:t>
+            </a:r>
+          </a:p>
+        </p:txBody>
+      </p:sp>
+      <p:sp>
+        <p:nvSpPr>
+          <p:cNvPr id="8" name="TextBox 7"/>
           <p:cNvSpPr txBox="1"/>
           <p:nvPr/>
         </p:nvSpPr>
@@ -4318,7 +4688,7 @@
                 </a:solidFill>
                 <a:latin typeface="Arial"/>
               </a:rPr>
-              <a:t>05 · SECTION　🔭</a:t>
+              <a:t>05 · SECTION　🔧</a:t>
             </a:r>
           </a:p>
         </p:txBody>
@@ -4353,30 +4723,34 @@
                 </a:solidFill>
                 <a:latin typeface="Arial"/>
               </a:rPr>
-              <a:t>下週關注</a:t>
-            </a:r>
-          </a:p>
-        </p:txBody>
-      </p:sp>
-      <p:sp>
-        <p:nvSpPr>
-          <p:cNvPr id="4" name="Oval 3"/>
+              <a:t>技術與供應鏈</a:t>
+            </a:r>
+          </a:p>
+        </p:txBody>
+      </p:sp>
+      <p:sp>
+        <p:nvSpPr>
+          <p:cNvPr id="4" name="Rounded Rectangle 3"/>
           <p:cNvSpPr/>
           <p:nvPr/>
         </p:nvSpPr>
         <p:spPr>
           <a:xfrm>
-            <a:off x="594360" y="1728216"/>
-            <a:ext cx="100584" cy="100584"/>
-          </a:xfrm>
-          <a:prstGeom prst="ellipse">
-            <a:avLst/>
+            <a:off x="548640" y="1600200"/>
+            <a:ext cx="5432907" cy="4754880"/>
+          </a:xfrm>
+          <a:prstGeom prst="roundRect">
+            <a:avLst>
+              <a:gd name="adj" fmla="val 6000"/>
+            </a:avLst>
           </a:prstGeom>
           <a:solidFill>
-            <a:srgbClr val="4C7EFF"/>
+            <a:srgbClr val="23262F"/>
           </a:solidFill>
-          <a:ln>
-            <a:noFill/>
+          <a:ln w="12700">
+            <a:solidFill>
+              <a:srgbClr val="4C7EFF"/>
+            </a:solidFill>
           </a:ln>
           <a:effectLst/>
         </p:spPr>
@@ -4410,8 +4784,43 @@
         </p:nvSpPr>
         <p:spPr>
           <a:xfrm>
-            <a:off x="868680" y="1600200"/>
-            <a:ext cx="10698480" cy="402336"/>
+            <a:off x="749808" y="1764792"/>
+            <a:ext cx="5030571" cy="457200"/>
+          </a:xfrm>
+          <a:prstGeom prst="rect">
+            <a:avLst/>
+          </a:prstGeom>
+          <a:noFill/>
+        </p:spPr>
+        <p:txBody>
+          <a:bodyPr wrap="square" anchor="t">
+            <a:spAutoFit/>
+          </a:bodyPr>
+          <a:lstStyle/>
+          <a:p>
+            <a:pPr algn="l"/>
+            <a:r>
+              <a:rPr sz="1450" b="1">
+                <a:solidFill>
+                  <a:srgbClr val="4C7EFF"/>
+                </a:solidFill>
+                <a:latin typeface="Arial"/>
+              </a:rPr>
+              <a:t>矽光子與光學模組瓶頸轉移</a:t>
+            </a:r>
+          </a:p>
+        </p:txBody>
+      </p:sp>
+      <p:sp>
+        <p:nvSpPr>
+          <p:cNvPr id="6" name="TextBox 5"/>
+          <p:cNvSpPr txBox="1"/>
+          <p:nvPr/>
+        </p:nvSpPr>
+        <p:spPr>
+          <a:xfrm>
+            <a:off x="749808" y="2258568"/>
+            <a:ext cx="5030571" cy="3931920"/>
           </a:xfrm>
           <a:prstGeom prst="rect">
             <a:avLst/>
@@ -4426,40 +4835,44 @@
           <a:p>
             <a:pPr>
               <a:lnSpc>
-                <a:spcPct val="115000"/>
+                <a:spcPct val="120000"/>
               </a:lnSpc>
             </a:pPr>
             <a:r>
-              <a:rPr sz="1450">
+              <a:rPr sz="1150">
                 <a:solidFill>
                   <a:srgbClr val="F5F3EC"/>
                 </a:solidFill>
                 <a:latin typeface="Arial"/>
               </a:rPr>
-              <a:t>高階雷射投影機與智慧投影新品在商用展廳、會議室與家用市場的終端實際銷售與促銷反應。</a:t>
-            </a:r>
-          </a:p>
-        </p:txBody>
-      </p:sp>
-      <p:sp>
-        <p:nvSpPr>
-          <p:cNvPr id="6" name="Oval 5"/>
+              <a:t>隨著矽光子技術發展，光學模組的生產瓶頸已從下游元件製造端，向上游轉移至雷射級基板的供應，突顯上游原材料與基板技術在顯示光學應用中的關鍵地位（DigiTimes）。</a:t>
+            </a:r>
+          </a:p>
+        </p:txBody>
+      </p:sp>
+      <p:sp>
+        <p:nvSpPr>
+          <p:cNvPr id="7" name="Rounded Rectangle 6"/>
           <p:cNvSpPr/>
           <p:nvPr/>
         </p:nvSpPr>
         <p:spPr>
           <a:xfrm>
-            <a:off x="594360" y="2130552"/>
-            <a:ext cx="100584" cy="100584"/>
-          </a:xfrm>
-          <a:prstGeom prst="ellipse">
-            <a:avLst/>
+            <a:off x="6210147" y="1600200"/>
+            <a:ext cx="5432907" cy="4754880"/>
+          </a:xfrm>
+          <a:prstGeom prst="roundRect">
+            <a:avLst>
+              <a:gd name="adj" fmla="val 6000"/>
+            </a:avLst>
           </a:prstGeom>
           <a:solidFill>
-            <a:srgbClr val="4C7EFF"/>
+            <a:srgbClr val="23262F"/>
           </a:solidFill>
-          <a:ln>
-            <a:noFill/>
+          <a:ln w="12700">
+            <a:solidFill>
+              <a:srgbClr val="FFB454"/>
+            </a:solidFill>
           </a:ln>
           <a:effectLst/>
         </p:spPr>
@@ -4487,14 +4900,49 @@
       </p:sp>
       <p:sp>
         <p:nvSpPr>
-          <p:cNvPr id="7" name="TextBox 6"/>
+          <p:cNvPr id="8" name="TextBox 7"/>
           <p:cNvSpPr txBox="1"/>
           <p:nvPr/>
         </p:nvSpPr>
         <p:spPr>
           <a:xfrm>
-            <a:off x="868680" y="2002536"/>
-            <a:ext cx="10698480" cy="402336"/>
+            <a:off x="6411315" y="1764792"/>
+            <a:ext cx="5030571" cy="457200"/>
+          </a:xfrm>
+          <a:prstGeom prst="rect">
+            <a:avLst/>
+          </a:prstGeom>
+          <a:noFill/>
+        </p:spPr>
+        <p:txBody>
+          <a:bodyPr wrap="square" anchor="t">
+            <a:spAutoFit/>
+          </a:bodyPr>
+          <a:lstStyle/>
+          <a:p>
+            <a:pPr algn="l"/>
+            <a:r>
+              <a:rPr sz="1450" b="1">
+                <a:solidFill>
+                  <a:srgbClr val="FFB454"/>
+                </a:solidFill>
+                <a:latin typeface="Arial"/>
+              </a:rPr>
+              <a:t>AI 競賽驅動連接技術</a:t>
+            </a:r>
+          </a:p>
+        </p:txBody>
+      </p:sp>
+      <p:sp>
+        <p:nvSpPr>
+          <p:cNvPr id="9" name="TextBox 8"/>
+          <p:cNvSpPr txBox="1"/>
+          <p:nvPr/>
+        </p:nvSpPr>
+        <p:spPr>
+          <a:xfrm>
+            <a:off x="6411315" y="2258568"/>
+            <a:ext cx="5030571" cy="3931920"/>
           </a:xfrm>
           <a:prstGeom prst="rect">
             <a:avLst/>
@@ -4509,24 +4957,24 @@
           <a:p>
             <a:pPr>
               <a:lnSpc>
-                <a:spcPct val="115000"/>
+                <a:spcPct val="120000"/>
               </a:lnSpc>
             </a:pPr>
             <a:r>
-              <a:rPr sz="1450">
+              <a:rPr sz="1150">
                 <a:solidFill>
                   <a:srgbClr val="F5F3EC"/>
                 </a:solidFill>
                 <a:latin typeface="Arial"/>
               </a:rPr>
-              <a:t>上游矽光子雷射級基板供應鏈的後續發展對光學模組與顯示設備帶動的影響。</a:t>
-            </a:r>
-          </a:p>
-        </p:txBody>
-      </p:sp>
-      <p:sp>
-        <p:nvSpPr>
-          <p:cNvPr id="8" name="TextBox 7"/>
+              <a:t>隨著 AI 競賽重心轉向資料傳輸與連接技術，鴻騰精密（FIT）正積極擴大光學互連產品的研發與佈局，提升高速傳輸效能與高頻寬資料中心互連技術（DigiTimes）。</a:t>
+            </a:r>
+          </a:p>
+        </p:txBody>
+      </p:sp>
+      <p:sp>
+        <p:nvSpPr>
+          <p:cNvPr id="10" name="TextBox 9"/>
           <p:cNvSpPr txBox="1"/>
           <p:nvPr/>
         </p:nvSpPr>
@@ -4587,22 +5035,90 @@
       <p:grpSpPr/>
       <p:sp>
         <p:nvSpPr>
-          <p:cNvPr id="2" name="Oval 1"/>
+          <p:cNvPr id="2" name="TextBox 1"/>
+          <p:cNvSpPr txBox="1"/>
+          <p:nvPr/>
+        </p:nvSpPr>
+        <p:spPr>
+          <a:xfrm>
+            <a:off x="548640" y="384048"/>
+            <a:ext cx="7315200" cy="320040"/>
+          </a:xfrm>
+          <a:prstGeom prst="rect">
+            <a:avLst/>
+          </a:prstGeom>
+          <a:noFill/>
+        </p:spPr>
+        <p:txBody>
+          <a:bodyPr wrap="square" anchor="t">
+            <a:spAutoFit/>
+          </a:bodyPr>
+          <a:lstStyle/>
+          <a:p>
+            <a:pPr algn="l"/>
+            <a:r>
+              <a:rPr sz="1100" b="1">
+                <a:solidFill>
+                  <a:srgbClr val="FFB454"/>
+                </a:solidFill>
+                <a:latin typeface="Arial"/>
+              </a:rPr>
+              <a:t>06 · SECTION　🔭</a:t>
+            </a:r>
+          </a:p>
+        </p:txBody>
+      </p:sp>
+      <p:sp>
+        <p:nvSpPr>
+          <p:cNvPr id="3" name="TextBox 2"/>
+          <p:cNvSpPr txBox="1"/>
+          <p:nvPr/>
+        </p:nvSpPr>
+        <p:spPr>
+          <a:xfrm>
+            <a:off x="548640" y="713232"/>
+            <a:ext cx="10972800" cy="685800"/>
+          </a:xfrm>
+          <a:prstGeom prst="rect">
+            <a:avLst/>
+          </a:prstGeom>
+          <a:noFill/>
+        </p:spPr>
+        <p:txBody>
+          <a:bodyPr wrap="square" anchor="t">
+            <a:spAutoFit/>
+          </a:bodyPr>
+          <a:lstStyle/>
+          <a:p>
+            <a:pPr algn="l"/>
+            <a:r>
+              <a:rPr sz="2600" b="1">
+                <a:solidFill>
+                  <a:srgbClr val="F5F3EC"/>
+                </a:solidFill>
+                <a:latin typeface="Arial"/>
+              </a:rPr>
+              <a:t>下週關注</a:t>
+            </a:r>
+          </a:p>
+        </p:txBody>
+      </p:sp>
+      <p:sp>
+        <p:nvSpPr>
+          <p:cNvPr id="4" name="Oval 3"/>
           <p:cNvSpPr/>
           <p:nvPr/>
         </p:nvSpPr>
         <p:spPr>
           <a:xfrm>
-            <a:off x="8961120" y="3200400"/>
-            <a:ext cx="5486400" cy="5486400"/>
+            <a:off x="594360" y="1728216"/>
+            <a:ext cx="100584" cy="100584"/>
           </a:xfrm>
           <a:prstGeom prst="ellipse">
             <a:avLst/>
           </a:prstGeom>
           <a:solidFill>
-            <a:srgbClr val="4C7EFF">
-              <a:alpha val="10000"/>
-            </a:srgbClr>
+            <a:srgbClr val="4C7EFF"/>
           </a:solidFill>
           <a:ln>
             <a:noFill/>
@@ -4633,6 +5149,235 @@
       </p:sp>
       <p:sp>
         <p:nvSpPr>
+          <p:cNvPr id="5" name="TextBox 4"/>
+          <p:cNvSpPr txBox="1"/>
+          <p:nvPr/>
+        </p:nvSpPr>
+        <p:spPr>
+          <a:xfrm>
+            <a:off x="868680" y="1600200"/>
+            <a:ext cx="10698480" cy="640080"/>
+          </a:xfrm>
+          <a:prstGeom prst="rect">
+            <a:avLst/>
+          </a:prstGeom>
+          <a:noFill/>
+        </p:spPr>
+        <p:txBody>
+          <a:bodyPr wrap="square">
+            <a:spAutoFit/>
+          </a:bodyPr>
+          <a:lstStyle/>
+          <a:p>
+            <a:pPr>
+              <a:lnSpc>
+                <a:spcPct val="115000"/>
+              </a:lnSpc>
+            </a:pPr>
+            <a:r>
+              <a:rPr sz="1450">
+                <a:solidFill>
+                  <a:srgbClr val="F5F3EC"/>
+                </a:solidFill>
+                <a:latin typeface="Arial"/>
+              </a:rPr>
+              <a:t>智慧投影機新品（如当贝 X9 Max、堅果 MIGO 等）在市場開售後的實際銷售表現與市場迴響。</a:t>
+            </a:r>
+          </a:p>
+        </p:txBody>
+      </p:sp>
+      <p:sp>
+        <p:nvSpPr>
+          <p:cNvPr id="6" name="Oval 5"/>
+          <p:cNvSpPr/>
+          <p:nvPr/>
+        </p:nvSpPr>
+        <p:spPr>
+          <a:xfrm>
+            <a:off x="594360" y="2368296"/>
+            <a:ext cx="100584" cy="100584"/>
+          </a:xfrm>
+          <a:prstGeom prst="ellipse">
+            <a:avLst/>
+          </a:prstGeom>
+          <a:solidFill>
+            <a:srgbClr val="4C7EFF"/>
+          </a:solidFill>
+          <a:ln>
+            <a:noFill/>
+          </a:ln>
+          <a:effectLst/>
+        </p:spPr>
+        <p:style>
+          <a:lnRef idx="1">
+            <a:schemeClr val="accent1"/>
+          </a:lnRef>
+          <a:fillRef idx="3">
+            <a:schemeClr val="accent1"/>
+          </a:fillRef>
+          <a:effectRef idx="2">
+            <a:schemeClr val="accent1"/>
+          </a:effectRef>
+          <a:fontRef idx="minor">
+            <a:schemeClr val="lt1"/>
+          </a:fontRef>
+        </p:style>
+        <p:txBody>
+          <a:bodyPr rtlCol="0" anchor="ctr"/>
+          <a:lstStyle/>
+          <a:p>
+            <a:pPr algn="ctr"/>
+          </a:p>
+        </p:txBody>
+      </p:sp>
+      <p:sp>
+        <p:nvSpPr>
+          <p:cNvPr id="7" name="TextBox 6"/>
+          <p:cNvSpPr txBox="1"/>
+          <p:nvPr/>
+        </p:nvSpPr>
+        <p:spPr>
+          <a:xfrm>
+            <a:off x="868680" y="2240280"/>
+            <a:ext cx="10698480" cy="640080"/>
+          </a:xfrm>
+          <a:prstGeom prst="rect">
+            <a:avLst/>
+          </a:prstGeom>
+          <a:noFill/>
+        </p:spPr>
+        <p:txBody>
+          <a:bodyPr wrap="square">
+            <a:spAutoFit/>
+          </a:bodyPr>
+          <a:lstStyle/>
+          <a:p>
+            <a:pPr>
+              <a:lnSpc>
+                <a:spcPct val="115000"/>
+              </a:lnSpc>
+            </a:pPr>
+            <a:r>
+              <a:rPr sz="1450">
+                <a:solidFill>
+                  <a:srgbClr val="F5F3EC"/>
+                </a:solidFill>
+                <a:latin typeface="Arial"/>
+              </a:rPr>
+              <a:t>供應鏈端矽光子技術從元件製造轉向雷射級基板供應後，對上游原材料與整體顯示光學應用的進一步影響。</a:t>
+            </a:r>
+          </a:p>
+        </p:txBody>
+      </p:sp>
+      <p:sp>
+        <p:nvSpPr>
+          <p:cNvPr id="8" name="TextBox 7"/>
+          <p:cNvSpPr txBox="1"/>
+          <p:nvPr/>
+        </p:nvSpPr>
+        <p:spPr>
+          <a:xfrm>
+            <a:off x="11430000" y="6446520"/>
+            <a:ext cx="548640" cy="274320"/>
+          </a:xfrm>
+          <a:prstGeom prst="rect">
+            <a:avLst/>
+          </a:prstGeom>
+          <a:noFill/>
+        </p:spPr>
+        <p:txBody>
+          <a:bodyPr wrap="square" anchor="t">
+            <a:spAutoFit/>
+          </a:bodyPr>
+          <a:lstStyle/>
+          <a:p>
+            <a:pPr algn="r"/>
+            <a:r>
+              <a:rPr sz="1000" b="0">
+                <a:solidFill>
+                  <a:srgbClr val="9096A1"/>
+                </a:solidFill>
+                <a:latin typeface="Arial"/>
+              </a:rPr>
+              <a:t>06</a:t>
+            </a:r>
+          </a:p>
+        </p:txBody>
+      </p:sp>
+    </p:spTree>
+  </p:cSld>
+  <p:clrMapOvr>
+    <a:masterClrMapping/>
+  </p:clrMapOvr>
+</p:sld>
+</file>
+
+<file path=ppt/slides/slide7.xml><?xml version="1.0" encoding="utf-8"?>
+<p:sld xmlns:a="http://schemas.openxmlformats.org/drawingml/2006/main" xmlns:p="http://schemas.openxmlformats.org/presentationml/2006/main" xmlns:r="http://schemas.openxmlformats.org/officeDocument/2006/relationships">
+  <p:cSld>
+    <p:bg>
+      <p:bgPr>
+        <a:solidFill>
+          <a:srgbClr val="14161A"/>
+        </a:solidFill>
+        <a:effectLst/>
+      </p:bgPr>
+    </p:bg>
+    <p:spTree>
+      <p:nvGrpSpPr>
+        <p:cNvPr id="1" name=""/>
+        <p:cNvGrpSpPr/>
+        <p:nvPr/>
+      </p:nvGrpSpPr>
+      <p:grpSpPr/>
+      <p:sp>
+        <p:nvSpPr>
+          <p:cNvPr id="2" name="Oval 1"/>
+          <p:cNvSpPr/>
+          <p:nvPr/>
+        </p:nvSpPr>
+        <p:spPr>
+          <a:xfrm>
+            <a:off x="8961120" y="3200400"/>
+            <a:ext cx="5486400" cy="5486400"/>
+          </a:xfrm>
+          <a:prstGeom prst="ellipse">
+            <a:avLst/>
+          </a:prstGeom>
+          <a:solidFill>
+            <a:srgbClr val="4C7EFF">
+              <a:alpha val="10000"/>
+            </a:srgbClr>
+          </a:solidFill>
+          <a:ln>
+            <a:noFill/>
+          </a:ln>
+          <a:effectLst/>
+        </p:spPr>
+        <p:style>
+          <a:lnRef idx="1">
+            <a:schemeClr val="accent1"/>
+          </a:lnRef>
+          <a:fillRef idx="3">
+            <a:schemeClr val="accent1"/>
+          </a:fillRef>
+          <a:effectRef idx="2">
+            <a:schemeClr val="accent1"/>
+          </a:effectRef>
+          <a:fontRef idx="minor">
+            <a:schemeClr val="lt1"/>
+          </a:fontRef>
+        </p:style>
+        <p:txBody>
+          <a:bodyPr rtlCol="0" anchor="ctr"/>
+          <a:lstStyle/>
+          <a:p>
+            <a:pPr algn="ctr"/>
+          </a:p>
+        </p:txBody>
+      </p:sp>
+      <p:sp>
+        <p:nvSpPr>
           <p:cNvPr id="3" name="TextBox 2"/>
           <p:cNvSpPr txBox="1"/>
           <p:nvPr/>
@@ -4731,7 +5476,7 @@
                 </a:solidFill>
                 <a:latin typeface="Arial"/>
               </a:rPr>
-              <a:t>06</a:t>
+              <a:t>07</a:t>
             </a:r>
           </a:p>
         </p:txBody>

--- a/data/reports/2026-W38.pptx
+++ b/data/reports/2026-W38.pptx
@@ -3448,7 +3448,7 @@
         <p:spPr>
           <a:xfrm>
             <a:off x="868680" y="1600200"/>
-            <a:ext cx="10698480" cy="1115568"/>
+            <a:ext cx="10698480" cy="877824"/>
           </a:xfrm>
           <a:prstGeom prst="rect">
             <a:avLst/>
@@ -3473,7 +3473,7 @@
                 </a:solidFill>
                 <a:latin typeface="Arial"/>
               </a:rPr>
-              <a:t>這週投影機產業聚焦於高階應用與供應鏈轉型，其中極米科技於成都雙年展達成 196 天零故障，成功展現消費品牌跨足 B 端文化展演市場的潛力。同時，上游矽光子光學模組的生產瓶頸已自元件製造端向上游雷射級基板供應轉移，而各大品牌如當貝、科視與 soundcore Nebula 也紛紛發表高階雷射投影與智慧投影新品，持續拓展多元應用場景。</a:t>
+              <a:t>這週投影機產業聚焦於高階應用與B端市場的跨界拓展。供應鏈方面，矽光子技術瓶頸正向上游雷射級基板轉移。品牌動態上，極米科技以高穩定性設備成功搶攻文化展演B端市場，達成196天零故障；同時，多款高階與智慧投影機新品陸續亮相，滿足不同場景的顯示需求。</a:t>
             </a:r>
           </a:p>
         </p:txBody>
@@ -3681,22 +3681,13 @@
               </a:lnSpc>
             </a:pPr>
             <a:r>
-              <a:rPr sz="1450" b="1">
-                <a:solidFill>
-                  <a:srgbClr val="FFB454"/>
-                </a:solidFill>
-                <a:latin typeface="Arial"/>
-              </a:rPr>
-              <a:t>消費品牌跨足 B 端展演</a:t>
-            </a:r>
-            <a:r>
               <a:rPr sz="1450">
                 <a:solidFill>
                   <a:srgbClr val="F5F3EC"/>
                 </a:solidFill>
                 <a:latin typeface="Arial"/>
               </a:rPr>
-              <a:t>：極米科技 70 台投影設備在成都雙年展 196 天展期中達成零故障運行，獲成都市美術館感謝函，開闢客廳以外的 B 端業務戰場（投影時代）。</a:t>
+              <a:t>極米科技的70台投影設備在成都雙年展196天展期中達成零故障運行，獲成都市美術館感謝函，成功將消費級投影品牌推向文化藝術B端市場（投影時代）。</a:t>
             </a:r>
           </a:p>
         </p:txBody>
@@ -3754,7 +3745,7 @@
         <p:spPr>
           <a:xfrm>
             <a:off x="868680" y="2240280"/>
-            <a:ext cx="10698480" cy="402336"/>
+            <a:ext cx="10698480" cy="640080"/>
           </a:xfrm>
           <a:prstGeom prst="rect">
             <a:avLst/>
@@ -3772,15 +3763,6 @@
                 <a:spcPct val="115000"/>
               </a:lnSpc>
             </a:pPr>
-            <a:r>
-              <a:rPr sz="1450" b="1">
-                <a:solidFill>
-                  <a:srgbClr val="FFB454"/>
-                </a:solidFill>
-                <a:latin typeface="Arial"/>
-              </a:rPr>
-              <a:t>高階智慧與雷射新品亮相</a:t>
-            </a:r>
             <a:r>
               <a:rPr sz="1450">
                 <a:solidFill>
@@ -3788,7 +3770,7 @@
                 </a:solidFill>
                 <a:latin typeface="Arial"/>
               </a:rPr>
-              <a:t>：</a:t>
+              <a:t>当贝推出全新 X9 Max 投影仪，主打 4800 CVIA 亮度、80000:1 動態對比度，搭載 QuaLas42 激光器與 MT9681 晶片，並支援米家生態（IT之家）。</a:t>
             </a:r>
           </a:p>
         </p:txBody>
@@ -3801,7 +3783,7 @@
         </p:nvSpPr>
         <p:spPr>
           <a:xfrm>
-            <a:off x="594360" y="2770632"/>
+            <a:off x="594360" y="3008376"/>
             <a:ext cx="100584" cy="100584"/>
           </a:xfrm>
           <a:prstGeom prst="ellipse">
@@ -3845,8 +3827,8 @@
         </p:nvSpPr>
         <p:spPr>
           <a:xfrm>
-            <a:off x="868680" y="2642616"/>
-            <a:ext cx="10698480" cy="640080"/>
+            <a:off x="868680" y="2880360"/>
+            <a:ext cx="10698480" cy="877824"/>
           </a:xfrm>
           <a:prstGeom prst="rect">
             <a:avLst/>
@@ -3871,7 +3853,7 @@
                 </a:solidFill>
                 <a:latin typeface="Arial"/>
               </a:rPr>
-              <a:t>当贝發布 X9 Max 投影儀，主打 4800 CVIA 亮度、80000:1 動態對比度、QuaLas42 激光器與 MT9681 晶片（IT之家）。</a:t>
+              <a:t>soundcore Nebula 發表 X1S 智慧投影機，具備 4K 解析度、6000 流明 RGB 雷射光源及 Google TV 系統，售價 2499 美元起（ProjectorReviews）。</a:t>
             </a:r>
           </a:p>
         </p:txBody>
@@ -3884,7 +3866,7 @@
         </p:nvSpPr>
         <p:spPr>
           <a:xfrm>
-            <a:off x="594360" y="3410712"/>
+            <a:off x="594360" y="3886200"/>
             <a:ext cx="100584" cy="100584"/>
           </a:xfrm>
           <a:prstGeom prst="ellipse">
@@ -3928,7 +3910,7 @@
         </p:nvSpPr>
         <p:spPr>
           <a:xfrm>
-            <a:off x="868680" y="3282696"/>
+            <a:off x="868680" y="3758184"/>
             <a:ext cx="10698480" cy="640080"/>
           </a:xfrm>
           <a:prstGeom prst="rect">
@@ -3954,7 +3936,7 @@
                 </a:solidFill>
                 <a:latin typeface="Arial"/>
               </a:rPr>
-              <a:t>soundcore Nebula 推出 X1S 智慧投影機，搭載 4K 解析度與 6000 流明 RGB 雷射光源，建議售價 2499 美元起（ProjectorReviews）。</a:t>
+              <a:t>堅果發布業界首款 360 度全景智能投影儀 MIGO，具備 750 CVIA 亮度與 DLP 顯示技術，國補到手價 1599.3 元（IT之家）。</a:t>
             </a:r>
           </a:p>
         </p:txBody>
@@ -3967,7 +3949,7 @@
         </p:nvSpPr>
         <p:spPr>
           <a:xfrm>
-            <a:off x="594360" y="4050792"/>
+            <a:off x="594360" y="4526280"/>
             <a:ext cx="100584" cy="100584"/>
           </a:xfrm>
           <a:prstGeom prst="ellipse">
@@ -4011,7 +3993,7 @@
         </p:nvSpPr>
         <p:spPr>
           <a:xfrm>
-            <a:off x="868680" y="3922776"/>
+            <a:off x="868680" y="4398264"/>
             <a:ext cx="10698480" cy="640080"/>
           </a:xfrm>
           <a:prstGeom prst="rect">
@@ -4037,7 +4019,7 @@
                 </a:solidFill>
                 <a:latin typeface="Arial"/>
               </a:rPr>
-              <a:t>堅果發布首款 360 度全景智能投影儀 MIGO，具備 750 CVIA 亮度與 DLP 顯示技術，國補到手價 1599.3 元（IT之家）。</a:t>
+              <a:t>騰訊上架新款極光投影儀 F5，主打 1080P 解析度與 345CVIA 流明，售價 822 元人民幣起（IT之家）。</a:t>
             </a:r>
           </a:p>
         </p:txBody>
@@ -4050,7 +4032,7 @@
         </p:nvSpPr>
         <p:spPr>
           <a:xfrm>
-            <a:off x="594360" y="4690872"/>
+            <a:off x="594360" y="5166360"/>
             <a:ext cx="100584" cy="100584"/>
           </a:xfrm>
           <a:prstGeom prst="ellipse">
@@ -4094,7 +4076,7 @@
         </p:nvSpPr>
         <p:spPr>
           <a:xfrm>
-            <a:off x="868680" y="4562856"/>
+            <a:off x="868680" y="5038344"/>
             <a:ext cx="10698480" cy="640080"/>
           </a:xfrm>
           <a:prstGeom prst="rect">
@@ -4120,189 +4102,14 @@
                 </a:solidFill>
                 <a:latin typeface="Arial"/>
               </a:rPr>
-              <a:t>騰訊上架極光投影儀 F5，主打 1080P 解析度與 345CVIA 流明，售價 822 元人民幣起（IT之家）。</a:t>
-            </a:r>
-          </a:p>
-        </p:txBody>
-      </p:sp>
-      <p:sp>
-        <p:nvSpPr>
-          <p:cNvPr id="16" name="Oval 15"/>
-          <p:cNvSpPr/>
-          <p:nvPr/>
-        </p:nvSpPr>
-        <p:spPr>
-          <a:xfrm>
-            <a:off x="594360" y="5330952"/>
-            <a:ext cx="100584" cy="100584"/>
-          </a:xfrm>
-          <a:prstGeom prst="ellipse">
-            <a:avLst/>
-          </a:prstGeom>
-          <a:solidFill>
-            <a:srgbClr val="4C7EFF"/>
-          </a:solidFill>
-          <a:ln>
-            <a:noFill/>
-          </a:ln>
-          <a:effectLst/>
-        </p:spPr>
-        <p:style>
-          <a:lnRef idx="1">
-            <a:schemeClr val="accent1"/>
-          </a:lnRef>
-          <a:fillRef idx="3">
-            <a:schemeClr val="accent1"/>
-          </a:fillRef>
-          <a:effectRef idx="2">
-            <a:schemeClr val="accent1"/>
-          </a:effectRef>
-          <a:fontRef idx="minor">
-            <a:schemeClr val="lt1"/>
-          </a:fontRef>
-        </p:style>
-        <p:txBody>
-          <a:bodyPr rtlCol="0" anchor="ctr"/>
-          <a:lstStyle/>
-          <a:p>
-            <a:pPr algn="ctr"/>
-          </a:p>
-        </p:txBody>
-      </p:sp>
-      <p:sp>
-        <p:nvSpPr>
-          <p:cNvPr id="17" name="TextBox 16"/>
-          <p:cNvSpPr txBox="1"/>
-          <p:nvPr/>
-        </p:nvSpPr>
-        <p:spPr>
-          <a:xfrm>
-            <a:off x="868680" y="5202936"/>
-            <a:ext cx="10698480" cy="402336"/>
-          </a:xfrm>
-          <a:prstGeom prst="rect">
-            <a:avLst/>
-          </a:prstGeom>
-          <a:noFill/>
-        </p:spPr>
-        <p:txBody>
-          <a:bodyPr wrap="square">
-            <a:spAutoFit/>
-          </a:bodyPr>
-          <a:lstStyle/>
-          <a:p>
-            <a:pPr>
-              <a:lnSpc>
-                <a:spcPct val="115000"/>
-              </a:lnSpc>
-            </a:pPr>
-            <a:r>
-              <a:rPr sz="1450" b="1">
-                <a:solidFill>
-                  <a:srgbClr val="FFB454"/>
-                </a:solidFill>
-                <a:latin typeface="Arial"/>
-              </a:rPr>
-              <a:t>展館與專業空間升級</a:t>
-            </a:r>
-            <a:r>
-              <a:rPr sz="1450">
-                <a:solidFill>
-                  <a:srgbClr val="F5F3EC"/>
-                </a:solidFill>
-                <a:latin typeface="Arial"/>
-              </a:rPr>
-              <a:t>：</a:t>
-            </a:r>
-          </a:p>
-        </p:txBody>
-      </p:sp>
-      <p:sp>
-        <p:nvSpPr>
-          <p:cNvPr id="18" name="Oval 17"/>
-          <p:cNvSpPr/>
-          <p:nvPr/>
-        </p:nvSpPr>
-        <p:spPr>
-          <a:xfrm>
-            <a:off x="594360" y="5733288"/>
-            <a:ext cx="100584" cy="100584"/>
-          </a:xfrm>
-          <a:prstGeom prst="ellipse">
-            <a:avLst/>
-          </a:prstGeom>
-          <a:solidFill>
-            <a:srgbClr val="4C7EFF"/>
-          </a:solidFill>
-          <a:ln>
-            <a:noFill/>
-          </a:ln>
-          <a:effectLst/>
-        </p:spPr>
-        <p:style>
-          <a:lnRef idx="1">
-            <a:schemeClr val="accent1"/>
-          </a:lnRef>
-          <a:fillRef idx="3">
-            <a:schemeClr val="accent1"/>
-          </a:fillRef>
-          <a:effectRef idx="2">
-            <a:schemeClr val="accent1"/>
-          </a:effectRef>
-          <a:fontRef idx="minor">
-            <a:schemeClr val="lt1"/>
-          </a:fontRef>
-        </p:style>
-        <p:txBody>
-          <a:bodyPr rtlCol="0" anchor="ctr"/>
-          <a:lstStyle/>
-          <a:p>
-            <a:pPr algn="ctr"/>
-          </a:p>
-        </p:txBody>
-      </p:sp>
-      <p:sp>
-        <p:nvSpPr>
-          <p:cNvPr id="19" name="TextBox 18"/>
-          <p:cNvSpPr txBox="1"/>
-          <p:nvPr/>
-        </p:nvSpPr>
-        <p:spPr>
-          <a:xfrm>
-            <a:off x="868680" y="5605272"/>
-            <a:ext cx="10698480" cy="640080"/>
-          </a:xfrm>
-          <a:prstGeom prst="rect">
-            <a:avLst/>
-          </a:prstGeom>
-          <a:noFill/>
-        </p:spPr>
-        <p:txBody>
-          <a:bodyPr wrap="square">
-            <a:spAutoFit/>
-          </a:bodyPr>
-          <a:lstStyle/>
-          <a:p>
-            <a:pPr>
-              <a:lnSpc>
-                <a:spcPct val="115000"/>
-              </a:lnSpc>
-            </a:pPr>
-            <a:r>
-              <a:rPr sz="1450">
-                <a:solidFill>
-                  <a:srgbClr val="F5F3EC"/>
-                </a:solidFill>
-                <a:latin typeface="Arial"/>
-              </a:rPr>
-              <a:t>科視 Christie 上海辦公室 3000 平米演示室完成升級，展出 Eclipse G3、Griffyn 與 M4K 系列等高階純雷射投影機（投影時代、投影時代）。</a:t>
-            </a:r>
-          </a:p>
-        </p:txBody>
-      </p:sp>
-      <p:sp>
-        <p:nvSpPr>
-          <p:cNvPr id="20" name="TextBox 19"/>
+              <a:t>科視上海辦公室演示室完成升級，展出 Eclipse G3、Griffyn 與 M4K 系列等高階純雷射投影機（投影時代）。</a:t>
+            </a:r>
+          </a:p>
+        </p:txBody>
+      </p:sp>
+      <p:sp>
+        <p:nvSpPr>
+          <p:cNvPr id="16" name="TextBox 15"/>
           <p:cNvSpPr txBox="1"/>
           <p:nvPr/>
         </p:nvSpPr>
@@ -4509,97 +4316,14 @@
                 </a:solidFill>
                 <a:latin typeface="Arial"/>
               </a:rPr>
-              <a:t>印度加爾各答詞語博物館採用 16 台科視雷射投影機（包含 Captiva 超短焦與 Inspire 系列 1DLP 機型）打造互動視覺體驗（投影時代）。</a:t>
-            </a:r>
-          </a:p>
-        </p:txBody>
-      </p:sp>
-      <p:sp>
-        <p:nvSpPr>
-          <p:cNvPr id="6" name="Oval 5"/>
-          <p:cNvSpPr/>
-          <p:nvPr/>
-        </p:nvSpPr>
-        <p:spPr>
-          <a:xfrm>
-            <a:off x="594360" y="2368296"/>
-            <a:ext cx="100584" cy="100584"/>
-          </a:xfrm>
-          <a:prstGeom prst="ellipse">
-            <a:avLst/>
-          </a:prstGeom>
-          <a:solidFill>
-            <a:srgbClr val="4C7EFF"/>
-          </a:solidFill>
-          <a:ln>
-            <a:noFill/>
-          </a:ln>
-          <a:effectLst/>
-        </p:spPr>
-        <p:style>
-          <a:lnRef idx="1">
-            <a:schemeClr val="accent1"/>
-          </a:lnRef>
-          <a:fillRef idx="3">
-            <a:schemeClr val="accent1"/>
-          </a:fillRef>
-          <a:effectRef idx="2">
-            <a:schemeClr val="accent1"/>
-          </a:effectRef>
-          <a:fontRef idx="minor">
-            <a:schemeClr val="lt1"/>
-          </a:fontRef>
-        </p:style>
-        <p:txBody>
-          <a:bodyPr rtlCol="0" anchor="ctr"/>
-          <a:lstStyle/>
-          <a:p>
-            <a:pPr algn="ctr"/>
-          </a:p>
-        </p:txBody>
-      </p:sp>
-      <p:sp>
-        <p:nvSpPr>
-          <p:cNvPr id="7" name="TextBox 6"/>
-          <p:cNvSpPr txBox="1"/>
-          <p:nvPr/>
-        </p:nvSpPr>
-        <p:spPr>
-          <a:xfrm>
-            <a:off x="868680" y="2240280"/>
-            <a:ext cx="10698480" cy="640080"/>
-          </a:xfrm>
-          <a:prstGeom prst="rect">
-            <a:avLst/>
-          </a:prstGeom>
-          <a:noFill/>
-        </p:spPr>
-        <p:txBody>
-          <a:bodyPr wrap="square">
-            <a:spAutoFit/>
-          </a:bodyPr>
-          <a:lstStyle/>
-          <a:p>
-            <a:pPr>
-              <a:lnSpc>
-                <a:spcPct val="115000"/>
-              </a:lnSpc>
-            </a:pPr>
-            <a:r>
-              <a:rPr sz="1450">
-                <a:solidFill>
-                  <a:srgbClr val="F5F3EC"/>
-                </a:solidFill>
-                <a:latin typeface="Arial"/>
-              </a:rPr>
-              <a:t>波士頓歌劇院攜手 MASARY工作室，採用 Epson 大型場館 4K 雷射投影機將字幕轉化為動態舞台藝術（Epson官方）。</a:t>
-            </a:r>
-          </a:p>
-        </p:txBody>
-      </p:sp>
-      <p:sp>
-        <p:nvSpPr>
-          <p:cNvPr id="8" name="TextBox 7"/>
+              <a:t>波士頓歌劇院採用 Epson 大型場館 4K 雷射投影機，將字幕轉化為動態舞台投影藝術（Epson官方）。</a:t>
+            </a:r>
+          </a:p>
+        </p:txBody>
+      </p:sp>
+      <p:sp>
+        <p:nvSpPr>
+          <p:cNvPr id="6" name="TextBox 5"/>
           <p:cNvSpPr txBox="1"/>
           <p:nvPr/>
         </p:nvSpPr>
@@ -4730,27 +4454,23 @@
       </p:sp>
       <p:sp>
         <p:nvSpPr>
-          <p:cNvPr id="4" name="Rounded Rectangle 3"/>
+          <p:cNvPr id="4" name="Oval 3"/>
           <p:cNvSpPr/>
           <p:nvPr/>
         </p:nvSpPr>
         <p:spPr>
           <a:xfrm>
-            <a:off x="548640" y="1600200"/>
-            <a:ext cx="5432907" cy="4754880"/>
-          </a:xfrm>
-          <a:prstGeom prst="roundRect">
-            <a:avLst>
-              <a:gd name="adj" fmla="val 6000"/>
-            </a:avLst>
+            <a:off x="594360" y="1728216"/>
+            <a:ext cx="100584" cy="100584"/>
+          </a:xfrm>
+          <a:prstGeom prst="ellipse">
+            <a:avLst/>
           </a:prstGeom>
           <a:solidFill>
-            <a:srgbClr val="23262F"/>
+            <a:srgbClr val="4C7EFF"/>
           </a:solidFill>
-          <a:ln w="12700">
-            <a:solidFill>
-              <a:srgbClr val="4C7EFF"/>
-            </a:solidFill>
+          <a:ln>
+            <a:noFill/>
           </a:ln>
           <a:effectLst/>
         </p:spPr>
@@ -4784,8 +4504,8 @@
         </p:nvSpPr>
         <p:spPr>
           <a:xfrm>
-            <a:off x="749808" y="1764792"/>
-            <a:ext cx="5030571" cy="457200"/>
+            <a:off x="868680" y="1600200"/>
+            <a:ext cx="10698480" cy="640080"/>
           </a:xfrm>
           <a:prstGeom prst="rect">
             <a:avLst/>
@@ -4793,41 +4513,6 @@
           <a:noFill/>
         </p:spPr>
         <p:txBody>
-          <a:bodyPr wrap="square" anchor="t">
-            <a:spAutoFit/>
-          </a:bodyPr>
-          <a:lstStyle/>
-          <a:p>
-            <a:pPr algn="l"/>
-            <a:r>
-              <a:rPr sz="1450" b="1">
-                <a:solidFill>
-                  <a:srgbClr val="4C7EFF"/>
-                </a:solidFill>
-                <a:latin typeface="Arial"/>
-              </a:rPr>
-              <a:t>矽光子與光學模組瓶頸轉移</a:t>
-            </a:r>
-          </a:p>
-        </p:txBody>
-      </p:sp>
-      <p:sp>
-        <p:nvSpPr>
-          <p:cNvPr id="6" name="TextBox 5"/>
-          <p:cNvSpPr txBox="1"/>
-          <p:nvPr/>
-        </p:nvSpPr>
-        <p:spPr>
-          <a:xfrm>
-            <a:off x="749808" y="2258568"/>
-            <a:ext cx="5030571" cy="3931920"/>
-          </a:xfrm>
-          <a:prstGeom prst="rect">
-            <a:avLst/>
-          </a:prstGeom>
-          <a:noFill/>
-        </p:spPr>
-        <p:txBody>
           <a:bodyPr wrap="square">
             <a:spAutoFit/>
           </a:bodyPr>
@@ -4835,44 +4520,40 @@
           <a:p>
             <a:pPr>
               <a:lnSpc>
-                <a:spcPct val="120000"/>
+                <a:spcPct val="115000"/>
               </a:lnSpc>
             </a:pPr>
             <a:r>
-              <a:rPr sz="1150">
+              <a:rPr sz="1450">
                 <a:solidFill>
                   <a:srgbClr val="F5F3EC"/>
                 </a:solidFill>
                 <a:latin typeface="Arial"/>
               </a:rPr>
-              <a:t>隨著矽光子技術發展，光學模組的生產瓶頸已從下游元件製造端，向上游轉移至雷射級基板的供應，突顯上游原材料與基板技術在顯示光學應用中的關鍵地位（DigiTimes）。</a:t>
-            </a:r>
-          </a:p>
-        </p:txBody>
-      </p:sp>
-      <p:sp>
-        <p:nvSpPr>
-          <p:cNvPr id="7" name="Rounded Rectangle 6"/>
+              <a:t>隨著矽光子技術發展，光學模組的生產瓶頸已從下游元件製造端，向上游雷射級基板的供應轉移（DigiTimes）。</a:t>
+            </a:r>
+          </a:p>
+        </p:txBody>
+      </p:sp>
+      <p:sp>
+        <p:nvSpPr>
+          <p:cNvPr id="6" name="Oval 5"/>
           <p:cNvSpPr/>
           <p:nvPr/>
         </p:nvSpPr>
         <p:spPr>
           <a:xfrm>
-            <a:off x="6210147" y="1600200"/>
-            <a:ext cx="5432907" cy="4754880"/>
-          </a:xfrm>
-          <a:prstGeom prst="roundRect">
-            <a:avLst>
-              <a:gd name="adj" fmla="val 6000"/>
-            </a:avLst>
+            <a:off x="594360" y="2368296"/>
+            <a:ext cx="100584" cy="100584"/>
+          </a:xfrm>
+          <a:prstGeom prst="ellipse">
+            <a:avLst/>
           </a:prstGeom>
           <a:solidFill>
-            <a:srgbClr val="23262F"/>
+            <a:srgbClr val="4C7EFF"/>
           </a:solidFill>
-          <a:ln w="12700">
-            <a:solidFill>
-              <a:srgbClr val="FFB454"/>
-            </a:solidFill>
+          <a:ln>
+            <a:noFill/>
           </a:ln>
           <a:effectLst/>
         </p:spPr>
@@ -4900,14 +4581,14 @@
       </p:sp>
       <p:sp>
         <p:nvSpPr>
-          <p:cNvPr id="8" name="TextBox 7"/>
+          <p:cNvPr id="7" name="TextBox 6"/>
           <p:cNvSpPr txBox="1"/>
           <p:nvPr/>
         </p:nvSpPr>
         <p:spPr>
           <a:xfrm>
-            <a:off x="6411315" y="1764792"/>
-            <a:ext cx="5030571" cy="457200"/>
+            <a:off x="868680" y="2240280"/>
+            <a:ext cx="10698480" cy="640080"/>
           </a:xfrm>
           <a:prstGeom prst="rect">
             <a:avLst/>
@@ -4915,41 +4596,6 @@
           <a:noFill/>
         </p:spPr>
         <p:txBody>
-          <a:bodyPr wrap="square" anchor="t">
-            <a:spAutoFit/>
-          </a:bodyPr>
-          <a:lstStyle/>
-          <a:p>
-            <a:pPr algn="l"/>
-            <a:r>
-              <a:rPr sz="1450" b="1">
-                <a:solidFill>
-                  <a:srgbClr val="FFB454"/>
-                </a:solidFill>
-                <a:latin typeface="Arial"/>
-              </a:rPr>
-              <a:t>AI 競賽驅動連接技術</a:t>
-            </a:r>
-          </a:p>
-        </p:txBody>
-      </p:sp>
-      <p:sp>
-        <p:nvSpPr>
-          <p:cNvPr id="9" name="TextBox 8"/>
-          <p:cNvSpPr txBox="1"/>
-          <p:nvPr/>
-        </p:nvSpPr>
-        <p:spPr>
-          <a:xfrm>
-            <a:off x="6411315" y="2258568"/>
-            <a:ext cx="5030571" cy="3931920"/>
-          </a:xfrm>
-          <a:prstGeom prst="rect">
-            <a:avLst/>
-          </a:prstGeom>
-          <a:noFill/>
-        </p:spPr>
-        <p:txBody>
           <a:bodyPr wrap="square">
             <a:spAutoFit/>
           </a:bodyPr>
@@ -4957,24 +4603,24 @@
           <a:p>
             <a:pPr>
               <a:lnSpc>
-                <a:spcPct val="120000"/>
+                <a:spcPct val="115000"/>
               </a:lnSpc>
             </a:pPr>
             <a:r>
-              <a:rPr sz="1150">
+              <a:rPr sz="1450">
                 <a:solidFill>
                   <a:srgbClr val="F5F3EC"/>
                 </a:solidFill>
                 <a:latin typeface="Arial"/>
               </a:rPr>
-              <a:t>隨著 AI 競賽重心轉向資料傳輸與連接技術，鴻騰精密（FIT）正積極擴大光學互連產品的研發與佈局，提升高速傳輸效能與高頻寬資料中心互連技術（DigiTimes）。</a:t>
-            </a:r>
-          </a:p>
-        </p:txBody>
-      </p:sp>
-      <p:sp>
-        <p:nvSpPr>
-          <p:cNvPr id="10" name="TextBox 9"/>
+              <a:t>鴻騰精密（FIT）正積極擴大光學互連產品的研發與佈局，因應 AI 賽局將競賽重心轉向資料傳輸與連接技術（DigiTimes）。</a:t>
+            </a:r>
+          </a:p>
+        </p:txBody>
+      </p:sp>
+      <p:sp>
+        <p:nvSpPr>
+          <p:cNvPr id="8" name="TextBox 7"/>
           <p:cNvSpPr txBox="1"/>
           <p:nvPr/>
         </p:nvSpPr>
@@ -5156,7 +4802,7 @@
         <p:spPr>
           <a:xfrm>
             <a:off x="868680" y="1600200"/>
-            <a:ext cx="10698480" cy="640080"/>
+            <a:ext cx="10698480" cy="402336"/>
           </a:xfrm>
           <a:prstGeom prst="rect">
             <a:avLst/>
@@ -5181,7 +4827,7 @@
                 </a:solidFill>
                 <a:latin typeface="Arial"/>
               </a:rPr>
-              <a:t>智慧投影機新品（如当贝 X9 Max、堅果 MIGO 等）在市場開售後的實際銷售表現與市場迴響。</a:t>
+              <a:t>關注矽光子技術在上游雷射級基板供應端的後續發展，以及對光學模組與相關顯示光學應用的影響。</a:t>
             </a:r>
           </a:p>
         </p:txBody>
@@ -5194,7 +4840,7 @@
         </p:nvSpPr>
         <p:spPr>
           <a:xfrm>
-            <a:off x="594360" y="2368296"/>
+            <a:off x="594360" y="2130552"/>
             <a:ext cx="100584" cy="100584"/>
           </a:xfrm>
           <a:prstGeom prst="ellipse">
@@ -5238,8 +4884,8 @@
         </p:nvSpPr>
         <p:spPr>
           <a:xfrm>
-            <a:off x="868680" y="2240280"/>
-            <a:ext cx="10698480" cy="640080"/>
+            <a:off x="868680" y="2002536"/>
+            <a:ext cx="10698480" cy="402336"/>
           </a:xfrm>
           <a:prstGeom prst="rect">
             <a:avLst/>
@@ -5264,7 +4910,7 @@
                 </a:solidFill>
                 <a:latin typeface="Arial"/>
               </a:rPr>
-              <a:t>供應鏈端矽光子技術從元件製造轉向雷射級基板供應後，對上游原材料與整體顯示光學應用的進一步影響。</a:t>
+              <a:t>觀察消費級投影品牌（如極米等）跨足B端文化展演與藝術場景的後續市場擴展效應。</a:t>
             </a:r>
           </a:p>
         </p:txBody>

--- a/data/reports/2026-W38.pptx
+++ b/data/reports/2026-W38.pptx
@@ -11,7 +11,6 @@
     <p:sldId id="259" r:id="rId10"/>
     <p:sldId id="260" r:id="rId11"/>
     <p:sldId id="261" r:id="rId12"/>
-    <p:sldId id="262" r:id="rId13"/>
   </p:sldIdLst>
   <p:sldSz cx="12191695" cy="6858000" type="screen4x3"/>
   <p:notesSz cx="6858000" cy="9144000"/>
@@ -3448,7 +3447,7 @@
         <p:spPr>
           <a:xfrm>
             <a:off x="868680" y="1600200"/>
-            <a:ext cx="10698480" cy="877824"/>
+            <a:ext cx="10698480" cy="1115568"/>
           </a:xfrm>
           <a:prstGeom prst="rect">
             <a:avLst/>
@@ -3473,7 +3472,7 @@
                 </a:solidFill>
                 <a:latin typeface="Arial"/>
               </a:rPr>
-              <a:t>這週投影機產業聚焦於高階應用與B端市場的跨界拓展。供應鏈方面，矽光子技術瓶頸正向上游雷射級基板轉移。品牌動態上，極米科技以高穩定性設備成功搶攻文化展演B端市場，達成196天零故障；同時，多款高階與智慧投影機新品陸續亮相，滿足不同場景的顯示需求。</a:t>
+              <a:t>這週投影機產業聚焦於供應鏈結構轉變與B端市場拓展。上游矽光子光學模組的生產瓶頸轉向雷射級基板供應，鴻騰精密也因應AI賽局積極擴大光學互連研發。在應用端，極米科技以70台設備在成都雙年展196天零故障的表現，成功開闢文化藝術展演的B端新業務戰場。此外，多家品牌如當貝、堅果、Soundcore等也相繼推出主打高亮度和智慧功能的全新投影機產品。</a:t>
             </a:r>
           </a:p>
         </p:txBody>
@@ -3611,23 +3610,27 @@
       </p:sp>
       <p:sp>
         <p:nvSpPr>
-          <p:cNvPr id="4" name="Oval 3"/>
+          <p:cNvPr id="4" name="Rounded Rectangle 3"/>
           <p:cNvSpPr/>
           <p:nvPr/>
         </p:nvSpPr>
         <p:spPr>
           <a:xfrm>
-            <a:off x="594360" y="1728216"/>
-            <a:ext cx="100584" cy="100584"/>
-          </a:xfrm>
-          <a:prstGeom prst="ellipse">
-            <a:avLst/>
+            <a:off x="548640" y="1600200"/>
+            <a:ext cx="3545738" cy="4754880"/>
+          </a:xfrm>
+          <a:prstGeom prst="roundRect">
+            <a:avLst>
+              <a:gd name="adj" fmla="val 6000"/>
+            </a:avLst>
           </a:prstGeom>
           <a:solidFill>
-            <a:srgbClr val="4C7EFF"/>
+            <a:srgbClr val="23262F"/>
           </a:solidFill>
-          <a:ln>
-            <a:noFill/>
+          <a:ln w="12700">
+            <a:solidFill>
+              <a:srgbClr val="4C7EFF"/>
+            </a:solidFill>
           </a:ln>
           <a:effectLst/>
         </p:spPr>
@@ -3661,8 +3664,8 @@
         </p:nvSpPr>
         <p:spPr>
           <a:xfrm>
-            <a:off x="868680" y="1600200"/>
-            <a:ext cx="10698480" cy="640080"/>
+            <a:off x="749808" y="1764792"/>
+            <a:ext cx="3143402" cy="457200"/>
           </a:xfrm>
           <a:prstGeom prst="rect">
             <a:avLst/>
@@ -3670,6 +3673,41 @@
           <a:noFill/>
         </p:spPr>
         <p:txBody>
+          <a:bodyPr wrap="square" anchor="t">
+            <a:spAutoFit/>
+          </a:bodyPr>
+          <a:lstStyle/>
+          <a:p>
+            <a:pPr algn="l"/>
+            <a:r>
+              <a:rPr sz="1450" b="1">
+                <a:solidFill>
+                  <a:srgbClr val="4C7EFF"/>
+                </a:solidFill>
+                <a:latin typeface="Arial"/>
+              </a:rPr>
+              <a:t>消費品牌跨足文化展演</a:t>
+            </a:r>
+          </a:p>
+        </p:txBody>
+      </p:sp>
+      <p:sp>
+        <p:nvSpPr>
+          <p:cNvPr id="6" name="TextBox 5"/>
+          <p:cNvSpPr txBox="1"/>
+          <p:nvPr/>
+        </p:nvSpPr>
+        <p:spPr>
+          <a:xfrm>
+            <a:off x="749808" y="2258568"/>
+            <a:ext cx="3143402" cy="3931920"/>
+          </a:xfrm>
+          <a:prstGeom prst="rect">
+            <a:avLst/>
+          </a:prstGeom>
+          <a:noFill/>
+        </p:spPr>
+        <p:txBody>
           <a:bodyPr wrap="square">
             <a:spAutoFit/>
           </a:bodyPr>
@@ -3677,40 +3715,44 @@
           <a:p>
             <a:pPr>
               <a:lnSpc>
-                <a:spcPct val="115000"/>
+                <a:spcPct val="120000"/>
               </a:lnSpc>
             </a:pPr>
             <a:r>
-              <a:rPr sz="1450">
+              <a:rPr sz="1150">
                 <a:solidFill>
                   <a:srgbClr val="F5F3EC"/>
                 </a:solidFill>
                 <a:latin typeface="Arial"/>
               </a:rPr>
-              <a:t>極米科技的70台投影設備在成都雙年展196天展期中達成零故障運行，獲成都市美術館感謝函，成功將消費級投影品牌推向文化藝術B端市場（投影時代）。</a:t>
-            </a:r>
-          </a:p>
-        </p:txBody>
-      </p:sp>
-      <p:sp>
-        <p:nvSpPr>
-          <p:cNvPr id="6" name="Oval 5"/>
+              <a:t>極米科技70台投影設備在成都雙年展196天展期中達成零故障運行，獲成都市美術館感謝函，成功開闢客廳以外的B端藝術展演業務戰場（投影時代）。</a:t>
+            </a:r>
+          </a:p>
+        </p:txBody>
+      </p:sp>
+      <p:sp>
+        <p:nvSpPr>
+          <p:cNvPr id="7" name="Rounded Rectangle 6"/>
           <p:cNvSpPr/>
           <p:nvPr/>
         </p:nvSpPr>
         <p:spPr>
           <a:xfrm>
-            <a:off x="594360" y="2368296"/>
-            <a:ext cx="100584" cy="100584"/>
-          </a:xfrm>
-          <a:prstGeom prst="ellipse">
-            <a:avLst/>
+            <a:off x="4322978" y="1600200"/>
+            <a:ext cx="3545738" cy="4754880"/>
+          </a:xfrm>
+          <a:prstGeom prst="roundRect">
+            <a:avLst>
+              <a:gd name="adj" fmla="val 6000"/>
+            </a:avLst>
           </a:prstGeom>
           <a:solidFill>
-            <a:srgbClr val="4C7EFF"/>
+            <a:srgbClr val="23262F"/>
           </a:solidFill>
-          <a:ln>
-            <a:noFill/>
+          <a:ln w="12700">
+            <a:solidFill>
+              <a:srgbClr val="FFB454"/>
+            </a:solidFill>
           </a:ln>
           <a:effectLst/>
         </p:spPr>
@@ -3738,14 +3780,14 @@
       </p:sp>
       <p:sp>
         <p:nvSpPr>
-          <p:cNvPr id="7" name="TextBox 6"/>
+          <p:cNvPr id="8" name="TextBox 7"/>
           <p:cNvSpPr txBox="1"/>
           <p:nvPr/>
         </p:nvSpPr>
         <p:spPr>
           <a:xfrm>
-            <a:off x="868680" y="2240280"/>
-            <a:ext cx="10698480" cy="640080"/>
+            <a:off x="4524146" y="1764792"/>
+            <a:ext cx="3143402" cy="457200"/>
           </a:xfrm>
           <a:prstGeom prst="rect">
             <a:avLst/>
@@ -3753,6 +3795,41 @@
           <a:noFill/>
         </p:spPr>
         <p:txBody>
+          <a:bodyPr wrap="square" anchor="t">
+            <a:spAutoFit/>
+          </a:bodyPr>
+          <a:lstStyle/>
+          <a:p>
+            <a:pPr algn="l"/>
+            <a:r>
+              <a:rPr sz="1450" b="1">
+                <a:solidFill>
+                  <a:srgbClr val="FFB454"/>
+                </a:solidFill>
+                <a:latin typeface="Arial"/>
+              </a:rPr>
+              <a:t>多款智慧與高階投影機亮相</a:t>
+            </a:r>
+          </a:p>
+        </p:txBody>
+      </p:sp>
+      <p:sp>
+        <p:nvSpPr>
+          <p:cNvPr id="9" name="TextBox 8"/>
+          <p:cNvSpPr txBox="1"/>
+          <p:nvPr/>
+        </p:nvSpPr>
+        <p:spPr>
+          <a:xfrm>
+            <a:off x="4524146" y="2258568"/>
+            <a:ext cx="3143402" cy="3931920"/>
+          </a:xfrm>
+          <a:prstGeom prst="rect">
+            <a:avLst/>
+          </a:prstGeom>
+          <a:noFill/>
+        </p:spPr>
+        <p:txBody>
           <a:bodyPr wrap="square">
             <a:spAutoFit/>
           </a:bodyPr>
@@ -3760,40 +3837,44 @@
           <a:p>
             <a:pPr>
               <a:lnSpc>
-                <a:spcPct val="115000"/>
+                <a:spcPct val="120000"/>
               </a:lnSpc>
             </a:pPr>
             <a:r>
-              <a:rPr sz="1450">
+              <a:rPr sz="1150">
                 <a:solidFill>
                   <a:srgbClr val="F5F3EC"/>
                 </a:solidFill>
                 <a:latin typeface="Arial"/>
               </a:rPr>
-              <a:t>当贝推出全新 X9 Max 投影仪，主打 4800 CVIA 亮度、80000:1 動態對比度，搭載 QuaLas42 激光器與 MT9681 晶片，並支援米家生態（IT之家）。</a:t>
-            </a:r>
-          </a:p>
-        </p:txBody>
-      </p:sp>
-      <p:sp>
-        <p:nvSpPr>
-          <p:cNvPr id="8" name="Oval 7"/>
+              <a:t>當貝推出 X9 Max 投影機，主打 4800 CVIA 亮度與 80000:1 動態對比度（IT之家）；soundcore Nebula 發表 4K 解析度與 6000 流明 RGB 雷射光源的 X1S 智慧投影機（ProjectorReviews）；堅果發布業界首款360度全景智能投影儀 MIGO，首發國補售價 1599.3 元（IT之家）；騰訊上架極光投影儀 F5，售價 822 元起（IT之家）。</a:t>
+            </a:r>
+          </a:p>
+        </p:txBody>
+      </p:sp>
+      <p:sp>
+        <p:nvSpPr>
+          <p:cNvPr id="10" name="Rounded Rectangle 9"/>
           <p:cNvSpPr/>
           <p:nvPr/>
         </p:nvSpPr>
         <p:spPr>
           <a:xfrm>
-            <a:off x="594360" y="3008376"/>
-            <a:ext cx="100584" cy="100584"/>
-          </a:xfrm>
-          <a:prstGeom prst="ellipse">
-            <a:avLst/>
+            <a:off x="8097316" y="1600200"/>
+            <a:ext cx="3545738" cy="4754880"/>
+          </a:xfrm>
+          <a:prstGeom prst="roundRect">
+            <a:avLst>
+              <a:gd name="adj" fmla="val 6000"/>
+            </a:avLst>
           </a:prstGeom>
           <a:solidFill>
-            <a:srgbClr val="4C7EFF"/>
+            <a:srgbClr val="23262F"/>
           </a:solidFill>
-          <a:ln>
-            <a:noFill/>
+          <a:ln w="12700">
+            <a:solidFill>
+              <a:srgbClr val="8B7FD6"/>
+            </a:solidFill>
           </a:ln>
           <a:effectLst/>
         </p:spPr>
@@ -3821,14 +3902,14 @@
       </p:sp>
       <p:sp>
         <p:nvSpPr>
-          <p:cNvPr id="9" name="TextBox 8"/>
+          <p:cNvPr id="11" name="TextBox 10"/>
           <p:cNvSpPr txBox="1"/>
           <p:nvPr/>
         </p:nvSpPr>
         <p:spPr>
           <a:xfrm>
-            <a:off x="868680" y="2880360"/>
-            <a:ext cx="10698480" cy="877824"/>
+            <a:off x="8298484" y="1764792"/>
+            <a:ext cx="3143402" cy="457200"/>
           </a:xfrm>
           <a:prstGeom prst="rect">
             <a:avLst/>
@@ -3836,6 +3917,41 @@
           <a:noFill/>
         </p:spPr>
         <p:txBody>
+          <a:bodyPr wrap="square" anchor="t">
+            <a:spAutoFit/>
+          </a:bodyPr>
+          <a:lstStyle/>
+          <a:p>
+            <a:pPr algn="l"/>
+            <a:r>
+              <a:rPr sz="1450" b="1">
+                <a:solidFill>
+                  <a:srgbClr val="8B7FD6"/>
+                </a:solidFill>
+                <a:latin typeface="Arial"/>
+              </a:rPr>
+              <a:t>大型展場與藝文應用落地</a:t>
+            </a:r>
+          </a:p>
+        </p:txBody>
+      </p:sp>
+      <p:sp>
+        <p:nvSpPr>
+          <p:cNvPr id="12" name="TextBox 11"/>
+          <p:cNvSpPr txBox="1"/>
+          <p:nvPr/>
+        </p:nvSpPr>
+        <p:spPr>
+          <a:xfrm>
+            <a:off x="8298484" y="2258568"/>
+            <a:ext cx="3143402" cy="3931920"/>
+          </a:xfrm>
+          <a:prstGeom prst="rect">
+            <a:avLst/>
+          </a:prstGeom>
+          <a:noFill/>
+        </p:spPr>
+        <p:txBody>
           <a:bodyPr wrap="square">
             <a:spAutoFit/>
           </a:bodyPr>
@@ -3843,273 +3959,24 @@
           <a:p>
             <a:pPr>
               <a:lnSpc>
-                <a:spcPct val="115000"/>
+                <a:spcPct val="120000"/>
               </a:lnSpc>
             </a:pPr>
             <a:r>
-              <a:rPr sz="1450">
+              <a:rPr sz="1150">
                 <a:solidFill>
                   <a:srgbClr val="F5F3EC"/>
                 </a:solidFill>
                 <a:latin typeface="Arial"/>
               </a:rPr>
-              <a:t>soundcore Nebula 發表 X1S 智慧投影機，具備 4K 解析度、6000 流明 RGB 雷射光源及 Google TV 系統，售價 2499 美元起（ProjectorReviews）。</a:t>
-            </a:r>
-          </a:p>
-        </p:txBody>
-      </p:sp>
-      <p:sp>
-        <p:nvSpPr>
-          <p:cNvPr id="10" name="Oval 9"/>
-          <p:cNvSpPr/>
-          <p:nvPr/>
-        </p:nvSpPr>
-        <p:spPr>
-          <a:xfrm>
-            <a:off x="594360" y="3886200"/>
-            <a:ext cx="100584" cy="100584"/>
-          </a:xfrm>
-          <a:prstGeom prst="ellipse">
-            <a:avLst/>
-          </a:prstGeom>
-          <a:solidFill>
-            <a:srgbClr val="4C7EFF"/>
-          </a:solidFill>
-          <a:ln>
-            <a:noFill/>
-          </a:ln>
-          <a:effectLst/>
-        </p:spPr>
-        <p:style>
-          <a:lnRef idx="1">
-            <a:schemeClr val="accent1"/>
-          </a:lnRef>
-          <a:fillRef idx="3">
-            <a:schemeClr val="accent1"/>
-          </a:fillRef>
-          <a:effectRef idx="2">
-            <a:schemeClr val="accent1"/>
-          </a:effectRef>
-          <a:fontRef idx="minor">
-            <a:schemeClr val="lt1"/>
-          </a:fontRef>
-        </p:style>
-        <p:txBody>
-          <a:bodyPr rtlCol="0" anchor="ctr"/>
-          <a:lstStyle/>
-          <a:p>
-            <a:pPr algn="ctr"/>
-          </a:p>
-        </p:txBody>
-      </p:sp>
-      <p:sp>
-        <p:nvSpPr>
-          <p:cNvPr id="11" name="TextBox 10"/>
-          <p:cNvSpPr txBox="1"/>
-          <p:nvPr/>
-        </p:nvSpPr>
-        <p:spPr>
-          <a:xfrm>
-            <a:off x="868680" y="3758184"/>
-            <a:ext cx="10698480" cy="640080"/>
-          </a:xfrm>
-          <a:prstGeom prst="rect">
-            <a:avLst/>
-          </a:prstGeom>
-          <a:noFill/>
-        </p:spPr>
-        <p:txBody>
-          <a:bodyPr wrap="square">
-            <a:spAutoFit/>
-          </a:bodyPr>
-          <a:lstStyle/>
-          <a:p>
-            <a:pPr>
-              <a:lnSpc>
-                <a:spcPct val="115000"/>
-              </a:lnSpc>
-            </a:pPr>
-            <a:r>
-              <a:rPr sz="1450">
-                <a:solidFill>
-                  <a:srgbClr val="F5F3EC"/>
-                </a:solidFill>
-                <a:latin typeface="Arial"/>
-              </a:rPr>
-              <a:t>堅果發布業界首款 360 度全景智能投影儀 MIGO，具備 750 CVIA 亮度與 DLP 顯示技術，國補到手價 1599.3 元（IT之家）。</a:t>
-            </a:r>
-          </a:p>
-        </p:txBody>
-      </p:sp>
-      <p:sp>
-        <p:nvSpPr>
-          <p:cNvPr id="12" name="Oval 11"/>
-          <p:cNvSpPr/>
-          <p:nvPr/>
-        </p:nvSpPr>
-        <p:spPr>
-          <a:xfrm>
-            <a:off x="594360" y="4526280"/>
-            <a:ext cx="100584" cy="100584"/>
-          </a:xfrm>
-          <a:prstGeom prst="ellipse">
-            <a:avLst/>
-          </a:prstGeom>
-          <a:solidFill>
-            <a:srgbClr val="4C7EFF"/>
-          </a:solidFill>
-          <a:ln>
-            <a:noFill/>
-          </a:ln>
-          <a:effectLst/>
-        </p:spPr>
-        <p:style>
-          <a:lnRef idx="1">
-            <a:schemeClr val="accent1"/>
-          </a:lnRef>
-          <a:fillRef idx="3">
-            <a:schemeClr val="accent1"/>
-          </a:fillRef>
-          <a:effectRef idx="2">
-            <a:schemeClr val="accent1"/>
-          </a:effectRef>
-          <a:fontRef idx="minor">
-            <a:schemeClr val="lt1"/>
-          </a:fontRef>
-        </p:style>
-        <p:txBody>
-          <a:bodyPr rtlCol="0" anchor="ctr"/>
-          <a:lstStyle/>
-          <a:p>
-            <a:pPr algn="ctr"/>
+              <a:t>科視上海辦公室演示室完成升級，展出 Eclipse G3 等高階設備（投影時代）；印度加爾各答詞語博物館採用 16 台科視雷射投影機打造互動視覺體驗（投影時代）；波士頓歌劇院與 MASARY 工作室採用 Epson 大型雷射投影機將字幕轉化為動態舞台藝術（Epson官方）。</a:t>
+            </a:r>
           </a:p>
         </p:txBody>
       </p:sp>
       <p:sp>
         <p:nvSpPr>
           <p:cNvPr id="13" name="TextBox 12"/>
-          <p:cNvSpPr txBox="1"/>
-          <p:nvPr/>
-        </p:nvSpPr>
-        <p:spPr>
-          <a:xfrm>
-            <a:off x="868680" y="4398264"/>
-            <a:ext cx="10698480" cy="640080"/>
-          </a:xfrm>
-          <a:prstGeom prst="rect">
-            <a:avLst/>
-          </a:prstGeom>
-          <a:noFill/>
-        </p:spPr>
-        <p:txBody>
-          <a:bodyPr wrap="square">
-            <a:spAutoFit/>
-          </a:bodyPr>
-          <a:lstStyle/>
-          <a:p>
-            <a:pPr>
-              <a:lnSpc>
-                <a:spcPct val="115000"/>
-              </a:lnSpc>
-            </a:pPr>
-            <a:r>
-              <a:rPr sz="1450">
-                <a:solidFill>
-                  <a:srgbClr val="F5F3EC"/>
-                </a:solidFill>
-                <a:latin typeface="Arial"/>
-              </a:rPr>
-              <a:t>騰訊上架新款極光投影儀 F5，主打 1080P 解析度與 345CVIA 流明，售價 822 元人民幣起（IT之家）。</a:t>
-            </a:r>
-          </a:p>
-        </p:txBody>
-      </p:sp>
-      <p:sp>
-        <p:nvSpPr>
-          <p:cNvPr id="14" name="Oval 13"/>
-          <p:cNvSpPr/>
-          <p:nvPr/>
-        </p:nvSpPr>
-        <p:spPr>
-          <a:xfrm>
-            <a:off x="594360" y="5166360"/>
-            <a:ext cx="100584" cy="100584"/>
-          </a:xfrm>
-          <a:prstGeom prst="ellipse">
-            <a:avLst/>
-          </a:prstGeom>
-          <a:solidFill>
-            <a:srgbClr val="4C7EFF"/>
-          </a:solidFill>
-          <a:ln>
-            <a:noFill/>
-          </a:ln>
-          <a:effectLst/>
-        </p:spPr>
-        <p:style>
-          <a:lnRef idx="1">
-            <a:schemeClr val="accent1"/>
-          </a:lnRef>
-          <a:fillRef idx="3">
-            <a:schemeClr val="accent1"/>
-          </a:fillRef>
-          <a:effectRef idx="2">
-            <a:schemeClr val="accent1"/>
-          </a:effectRef>
-          <a:fontRef idx="minor">
-            <a:schemeClr val="lt1"/>
-          </a:fontRef>
-        </p:style>
-        <p:txBody>
-          <a:bodyPr rtlCol="0" anchor="ctr"/>
-          <a:lstStyle/>
-          <a:p>
-            <a:pPr algn="ctr"/>
-          </a:p>
-        </p:txBody>
-      </p:sp>
-      <p:sp>
-        <p:nvSpPr>
-          <p:cNvPr id="15" name="TextBox 14"/>
-          <p:cNvSpPr txBox="1"/>
-          <p:nvPr/>
-        </p:nvSpPr>
-        <p:spPr>
-          <a:xfrm>
-            <a:off x="868680" y="5038344"/>
-            <a:ext cx="10698480" cy="640080"/>
-          </a:xfrm>
-          <a:prstGeom prst="rect">
-            <a:avLst/>
-          </a:prstGeom>
-          <a:noFill/>
-        </p:spPr>
-        <p:txBody>
-          <a:bodyPr wrap="square">
-            <a:spAutoFit/>
-          </a:bodyPr>
-          <a:lstStyle/>
-          <a:p>
-            <a:pPr>
-              <a:lnSpc>
-                <a:spcPct val="115000"/>
-              </a:lnSpc>
-            </a:pPr>
-            <a:r>
-              <a:rPr sz="1450">
-                <a:solidFill>
-                  <a:srgbClr val="F5F3EC"/>
-                </a:solidFill>
-                <a:latin typeface="Arial"/>
-              </a:rPr>
-              <a:t>科視上海辦公室演示室完成升級，展出 Eclipse G3、Griffyn 與 M4K 系列等高階純雷射投影機（投影時代）。</a:t>
-            </a:r>
-          </a:p>
-        </p:txBody>
-      </p:sp>
-      <p:sp>
-        <p:nvSpPr>
-          <p:cNvPr id="16" name="TextBox 15"/>
           <p:cNvSpPr txBox="1"/>
           <p:nvPr/>
         </p:nvSpPr>
@@ -4198,7 +4065,7 @@
                 </a:solidFill>
                 <a:latin typeface="Arial"/>
               </a:rPr>
-              <a:t>04 · SECTION　✨</a:t>
+              <a:t>04 · SECTION　🔧</a:t>
             </a:r>
           </a:p>
         </p:txBody>
@@ -4233,30 +4100,34 @@
                 </a:solidFill>
                 <a:latin typeface="Arial"/>
               </a:rPr>
-              <a:t>市場與品牌動態</a:t>
-            </a:r>
-          </a:p>
-        </p:txBody>
-      </p:sp>
-      <p:sp>
-        <p:nvSpPr>
-          <p:cNvPr id="4" name="Oval 3"/>
+              <a:t>技術與供應鏈</a:t>
+            </a:r>
+          </a:p>
+        </p:txBody>
+      </p:sp>
+      <p:sp>
+        <p:nvSpPr>
+          <p:cNvPr id="4" name="Rounded Rectangle 3"/>
           <p:cNvSpPr/>
           <p:nvPr/>
         </p:nvSpPr>
         <p:spPr>
           <a:xfrm>
-            <a:off x="594360" y="1728216"/>
-            <a:ext cx="100584" cy="100584"/>
-          </a:xfrm>
-          <a:prstGeom prst="ellipse">
-            <a:avLst/>
+            <a:off x="548640" y="1600200"/>
+            <a:ext cx="11094415" cy="4754880"/>
+          </a:xfrm>
+          <a:prstGeom prst="roundRect">
+            <a:avLst>
+              <a:gd name="adj" fmla="val 6000"/>
+            </a:avLst>
           </a:prstGeom>
           <a:solidFill>
-            <a:srgbClr val="4C7EFF"/>
+            <a:srgbClr val="23262F"/>
           </a:solidFill>
-          <a:ln>
-            <a:noFill/>
+          <a:ln w="12700">
+            <a:solidFill>
+              <a:srgbClr val="4C7EFF"/>
+            </a:solidFill>
           </a:ln>
           <a:effectLst/>
         </p:spPr>
@@ -4290,8 +4161,8 @@
         </p:nvSpPr>
         <p:spPr>
           <a:xfrm>
-            <a:off x="868680" y="1600200"/>
-            <a:ext cx="10698480" cy="640080"/>
+            <a:off x="749808" y="1764792"/>
+            <a:ext cx="10692079" cy="457200"/>
           </a:xfrm>
           <a:prstGeom prst="rect">
             <a:avLst/>
@@ -4299,6 +4170,41 @@
           <a:noFill/>
         </p:spPr>
         <p:txBody>
+          <a:bodyPr wrap="square" anchor="t">
+            <a:spAutoFit/>
+          </a:bodyPr>
+          <a:lstStyle/>
+          <a:p>
+            <a:pPr algn="l"/>
+            <a:r>
+              <a:rPr sz="1450" b="1">
+                <a:solidFill>
+                  <a:srgbClr val="4C7EFF"/>
+                </a:solidFill>
+                <a:latin typeface="Arial"/>
+              </a:rPr>
+              <a:t>矽光子與光學互連技術</a:t>
+            </a:r>
+          </a:p>
+        </p:txBody>
+      </p:sp>
+      <p:sp>
+        <p:nvSpPr>
+          <p:cNvPr id="6" name="TextBox 5"/>
+          <p:cNvSpPr txBox="1"/>
+          <p:nvPr/>
+        </p:nvSpPr>
+        <p:spPr>
+          <a:xfrm>
+            <a:off x="749808" y="2258568"/>
+            <a:ext cx="10692079" cy="3931920"/>
+          </a:xfrm>
+          <a:prstGeom prst="rect">
+            <a:avLst/>
+          </a:prstGeom>
+          <a:noFill/>
+        </p:spPr>
+        <p:txBody>
           <a:bodyPr wrap="square">
             <a:spAutoFit/>
           </a:bodyPr>
@@ -4306,24 +4212,24 @@
           <a:p>
             <a:pPr>
               <a:lnSpc>
-                <a:spcPct val="115000"/>
+                <a:spcPct val="120000"/>
               </a:lnSpc>
             </a:pPr>
             <a:r>
-              <a:rPr sz="1450">
+              <a:rPr sz="1150">
                 <a:solidFill>
                   <a:srgbClr val="F5F3EC"/>
                 </a:solidFill>
                 <a:latin typeface="Arial"/>
               </a:rPr>
-              <a:t>波士頓歌劇院採用 Epson 大型場館 4K 雷射投影機，將字幕轉化為動態舞台投影藝術（Epson官方）。</a:t>
-            </a:r>
-          </a:p>
-        </p:txBody>
-      </p:sp>
-      <p:sp>
-        <p:nvSpPr>
-          <p:cNvPr id="6" name="TextBox 5"/>
+              <a:t>矽光子技術發展下，光學模組的生產瓶頸已從下游元件製造端，向上游轉移至雷射級基板的供應（DigiTimes）。同時，面對AI競賽重心轉向資料傳輸與連接技術，鴻騰精密（FIT）正積極擴大光學互連產品的研發與佈局（DigiTimes）。</a:t>
+            </a:r>
+          </a:p>
+        </p:txBody>
+      </p:sp>
+      <p:sp>
+        <p:nvSpPr>
+          <p:cNvPr id="7" name="TextBox 6"/>
           <p:cNvSpPr txBox="1"/>
           <p:nvPr/>
         </p:nvSpPr>
@@ -4412,7 +4318,7 @@
                 </a:solidFill>
                 <a:latin typeface="Arial"/>
               </a:rPr>
-              <a:t>05 · SECTION　🔧</a:t>
+              <a:t>05 · SECTION　🔭</a:t>
             </a:r>
           </a:p>
         </p:txBody>
@@ -4447,7 +4353,7 @@
                 </a:solidFill>
                 <a:latin typeface="Arial"/>
               </a:rPr>
-              <a:t>技術與供應鏈</a:t>
+              <a:t>下週關注</a:t>
             </a:r>
           </a:p>
         </p:txBody>
@@ -4530,7 +4436,7 @@
                 </a:solidFill>
                 <a:latin typeface="Arial"/>
               </a:rPr>
-              <a:t>隨著矽光子技術發展，光學模組的生產瓶頸已從下游元件製造端，向上游雷射級基板的供應轉移（DigiTimes）。</a:t>
+              <a:t>隨著當貝 X9 Max、堅果 MIGO 等新機陸續上市與開售，市場對於高階智慧投影機與具備全景旋轉功能的新型態設備之實際銷售反應與通路表現。</a:t>
             </a:r>
           </a:p>
         </p:txBody>
@@ -4613,7 +4519,7 @@
                 </a:solidFill>
                 <a:latin typeface="Arial"/>
               </a:rPr>
-              <a:t>鴻騰精密（FIT）正積極擴大光學互連產品的研發與佈局，因應 AI 賽局將競賽重心轉向資料傳輸與連接技術（DigiTimes）。</a:t>
+              <a:t>供應鏈端由矽光子光學模組轉向雷射級基板供應的瓶頸問題，後續對高階雷射投影光源與光通訊相關應用成本及產能的進一步影響。</a:t>
             </a:r>
           </a:p>
         </p:txBody>
@@ -4681,90 +4587,22 @@
       <p:grpSpPr/>
       <p:sp>
         <p:nvSpPr>
-          <p:cNvPr id="2" name="TextBox 1"/>
-          <p:cNvSpPr txBox="1"/>
-          <p:nvPr/>
-        </p:nvSpPr>
-        <p:spPr>
-          <a:xfrm>
-            <a:off x="548640" y="384048"/>
-            <a:ext cx="7315200" cy="320040"/>
-          </a:xfrm>
-          <a:prstGeom prst="rect">
-            <a:avLst/>
-          </a:prstGeom>
-          <a:noFill/>
-        </p:spPr>
-        <p:txBody>
-          <a:bodyPr wrap="square" anchor="t">
-            <a:spAutoFit/>
-          </a:bodyPr>
-          <a:lstStyle/>
-          <a:p>
-            <a:pPr algn="l"/>
-            <a:r>
-              <a:rPr sz="1100" b="1">
-                <a:solidFill>
-                  <a:srgbClr val="FFB454"/>
-                </a:solidFill>
-                <a:latin typeface="Arial"/>
-              </a:rPr>
-              <a:t>06 · SECTION　🔭</a:t>
-            </a:r>
-          </a:p>
-        </p:txBody>
-      </p:sp>
-      <p:sp>
-        <p:nvSpPr>
-          <p:cNvPr id="3" name="TextBox 2"/>
-          <p:cNvSpPr txBox="1"/>
-          <p:nvPr/>
-        </p:nvSpPr>
-        <p:spPr>
-          <a:xfrm>
-            <a:off x="548640" y="713232"/>
-            <a:ext cx="10972800" cy="685800"/>
-          </a:xfrm>
-          <a:prstGeom prst="rect">
-            <a:avLst/>
-          </a:prstGeom>
-          <a:noFill/>
-        </p:spPr>
-        <p:txBody>
-          <a:bodyPr wrap="square" anchor="t">
-            <a:spAutoFit/>
-          </a:bodyPr>
-          <a:lstStyle/>
-          <a:p>
-            <a:pPr algn="l"/>
-            <a:r>
-              <a:rPr sz="2600" b="1">
-                <a:solidFill>
-                  <a:srgbClr val="F5F3EC"/>
-                </a:solidFill>
-                <a:latin typeface="Arial"/>
-              </a:rPr>
-              <a:t>下週關注</a:t>
-            </a:r>
-          </a:p>
-        </p:txBody>
-      </p:sp>
-      <p:sp>
-        <p:nvSpPr>
-          <p:cNvPr id="4" name="Oval 3"/>
+          <p:cNvPr id="2" name="Oval 1"/>
           <p:cNvSpPr/>
           <p:nvPr/>
         </p:nvSpPr>
         <p:spPr>
           <a:xfrm>
-            <a:off x="594360" y="1728216"/>
-            <a:ext cx="100584" cy="100584"/>
+            <a:off x="8961120" y="3200400"/>
+            <a:ext cx="5486400" cy="5486400"/>
           </a:xfrm>
           <a:prstGeom prst="ellipse">
             <a:avLst/>
           </a:prstGeom>
           <a:solidFill>
-            <a:srgbClr val="4C7EFF"/>
+            <a:srgbClr val="4C7EFF">
+              <a:alpha val="10000"/>
+            </a:srgbClr>
           </a:solidFill>
           <a:ln>
             <a:noFill/>
@@ -4795,14 +4633,14 @@
       </p:sp>
       <p:sp>
         <p:nvSpPr>
-          <p:cNvPr id="5" name="TextBox 4"/>
+          <p:cNvPr id="3" name="TextBox 2"/>
           <p:cNvSpPr txBox="1"/>
           <p:nvPr/>
         </p:nvSpPr>
         <p:spPr>
           <a:xfrm>
-            <a:off x="868680" y="1600200"/>
-            <a:ext cx="10698480" cy="402336"/>
+            <a:off x="731520" y="2926080"/>
+            <a:ext cx="9144000" cy="822960"/>
           </a:xfrm>
           <a:prstGeom prst="rect">
             <a:avLst/>
@@ -4810,82 +4648,34 @@
           <a:noFill/>
         </p:spPr>
         <p:txBody>
-          <a:bodyPr wrap="square">
+          <a:bodyPr wrap="square" anchor="t">
             <a:spAutoFit/>
           </a:bodyPr>
           <a:lstStyle/>
           <a:p>
-            <a:pPr>
-              <a:lnSpc>
-                <a:spcPct val="115000"/>
-              </a:lnSpc>
-            </a:pPr>
-            <a:r>
-              <a:rPr sz="1450">
+            <a:pPr algn="l"/>
+            <a:r>
+              <a:rPr sz="3000" b="1">
                 <a:solidFill>
                   <a:srgbClr val="F5F3EC"/>
                 </a:solidFill>
                 <a:latin typeface="Arial"/>
               </a:rPr>
-              <a:t>關注矽光子技術在上游雷射級基板供應端的後續發展，以及對光學模組與相關顯示光學應用的影響。</a:t>
-            </a:r>
-          </a:p>
-        </p:txBody>
-      </p:sp>
-      <p:sp>
-        <p:nvSpPr>
-          <p:cNvPr id="6" name="Oval 5"/>
-          <p:cNvSpPr/>
-          <p:nvPr/>
-        </p:nvSpPr>
-        <p:spPr>
-          <a:xfrm>
-            <a:off x="594360" y="2130552"/>
-            <a:ext cx="100584" cy="100584"/>
-          </a:xfrm>
-          <a:prstGeom prst="ellipse">
-            <a:avLst/>
-          </a:prstGeom>
-          <a:solidFill>
-            <a:srgbClr val="4C7EFF"/>
-          </a:solidFill>
-          <a:ln>
-            <a:noFill/>
-          </a:ln>
-          <a:effectLst/>
-        </p:spPr>
-        <p:style>
-          <a:lnRef idx="1">
-            <a:schemeClr val="accent1"/>
-          </a:lnRef>
-          <a:fillRef idx="3">
-            <a:schemeClr val="accent1"/>
-          </a:fillRef>
-          <a:effectRef idx="2">
-            <a:schemeClr val="accent1"/>
-          </a:effectRef>
-          <a:fontRef idx="minor">
-            <a:schemeClr val="lt1"/>
-          </a:fontRef>
-        </p:style>
-        <p:txBody>
-          <a:bodyPr rtlCol="0" anchor="ctr"/>
-          <a:lstStyle/>
-          <a:p>
-            <a:pPr algn="ctr"/>
-          </a:p>
-        </p:txBody>
-      </p:sp>
-      <p:sp>
-        <p:nvSpPr>
-          <p:cNvPr id="7" name="TextBox 6"/>
+              <a:t>投影機情報站</a:t>
+            </a:r>
+          </a:p>
+        </p:txBody>
+      </p:sp>
+      <p:sp>
+        <p:nvSpPr>
+          <p:cNvPr id="4" name="TextBox 3"/>
           <p:cNvSpPr txBox="1"/>
           <p:nvPr/>
         </p:nvSpPr>
         <p:spPr>
           <a:xfrm>
-            <a:off x="868680" y="2002536"/>
-            <a:ext cx="10698480" cy="402336"/>
+            <a:off x="731520" y="3611880"/>
+            <a:ext cx="9144000" cy="457200"/>
           </a:xfrm>
           <a:prstGeom prst="rect">
             <a:avLst/>
@@ -4893,31 +4683,27 @@
           <a:noFill/>
         </p:spPr>
         <p:txBody>
-          <a:bodyPr wrap="square">
+          <a:bodyPr wrap="square" anchor="t">
             <a:spAutoFit/>
           </a:bodyPr>
           <a:lstStyle/>
           <a:p>
-            <a:pPr>
-              <a:lnSpc>
-                <a:spcPct val="115000"/>
-              </a:lnSpc>
-            </a:pPr>
-            <a:r>
-              <a:rPr sz="1450">
+            <a:pPr algn="l"/>
+            <a:r>
+              <a:rPr sz="1400" b="0">
                 <a:solidFill>
-                  <a:srgbClr val="F5F3EC"/>
+                  <a:srgbClr val="9096A1"/>
                 </a:solidFill>
                 <a:latin typeface="Arial"/>
               </a:rPr>
-              <a:t>觀察消費級投影品牌（如極米等）跨足B端文化展演與藝術場景的後續市場擴展效應。</a:t>
-            </a:r>
-          </a:p>
-        </p:txBody>
-      </p:sp>
-      <p:sp>
-        <p:nvSpPr>
-          <p:cNvPr id="8" name="TextBox 7"/>
+              <a:t>由本站爬蟲每日追蹤產業動態，AI 自動摘要與分類</a:t>
+            </a:r>
+          </a:p>
+        </p:txBody>
+      </p:sp>
+      <p:sp>
+        <p:nvSpPr>
+          <p:cNvPr id="5" name="TextBox 4"/>
           <p:cNvSpPr txBox="1"/>
           <p:nvPr/>
         </p:nvSpPr>
@@ -4946,183 +4732,6 @@
                 <a:latin typeface="Arial"/>
               </a:rPr>
               <a:t>06</a:t>
-            </a:r>
-          </a:p>
-        </p:txBody>
-      </p:sp>
-    </p:spTree>
-  </p:cSld>
-  <p:clrMapOvr>
-    <a:masterClrMapping/>
-  </p:clrMapOvr>
-</p:sld>
-</file>
-
-<file path=ppt/slides/slide7.xml><?xml version="1.0" encoding="utf-8"?>
-<p:sld xmlns:a="http://schemas.openxmlformats.org/drawingml/2006/main" xmlns:p="http://schemas.openxmlformats.org/presentationml/2006/main" xmlns:r="http://schemas.openxmlformats.org/officeDocument/2006/relationships">
-  <p:cSld>
-    <p:bg>
-      <p:bgPr>
-        <a:solidFill>
-          <a:srgbClr val="14161A"/>
-        </a:solidFill>
-        <a:effectLst/>
-      </p:bgPr>
-    </p:bg>
-    <p:spTree>
-      <p:nvGrpSpPr>
-        <p:cNvPr id="1" name=""/>
-        <p:cNvGrpSpPr/>
-        <p:nvPr/>
-      </p:nvGrpSpPr>
-      <p:grpSpPr/>
-      <p:sp>
-        <p:nvSpPr>
-          <p:cNvPr id="2" name="Oval 1"/>
-          <p:cNvSpPr/>
-          <p:nvPr/>
-        </p:nvSpPr>
-        <p:spPr>
-          <a:xfrm>
-            <a:off x="8961120" y="3200400"/>
-            <a:ext cx="5486400" cy="5486400"/>
-          </a:xfrm>
-          <a:prstGeom prst="ellipse">
-            <a:avLst/>
-          </a:prstGeom>
-          <a:solidFill>
-            <a:srgbClr val="4C7EFF">
-              <a:alpha val="10000"/>
-            </a:srgbClr>
-          </a:solidFill>
-          <a:ln>
-            <a:noFill/>
-          </a:ln>
-          <a:effectLst/>
-        </p:spPr>
-        <p:style>
-          <a:lnRef idx="1">
-            <a:schemeClr val="accent1"/>
-          </a:lnRef>
-          <a:fillRef idx="3">
-            <a:schemeClr val="accent1"/>
-          </a:fillRef>
-          <a:effectRef idx="2">
-            <a:schemeClr val="accent1"/>
-          </a:effectRef>
-          <a:fontRef idx="minor">
-            <a:schemeClr val="lt1"/>
-          </a:fontRef>
-        </p:style>
-        <p:txBody>
-          <a:bodyPr rtlCol="0" anchor="ctr"/>
-          <a:lstStyle/>
-          <a:p>
-            <a:pPr algn="ctr"/>
-          </a:p>
-        </p:txBody>
-      </p:sp>
-      <p:sp>
-        <p:nvSpPr>
-          <p:cNvPr id="3" name="TextBox 2"/>
-          <p:cNvSpPr txBox="1"/>
-          <p:nvPr/>
-        </p:nvSpPr>
-        <p:spPr>
-          <a:xfrm>
-            <a:off x="731520" y="2926080"/>
-            <a:ext cx="9144000" cy="822960"/>
-          </a:xfrm>
-          <a:prstGeom prst="rect">
-            <a:avLst/>
-          </a:prstGeom>
-          <a:noFill/>
-        </p:spPr>
-        <p:txBody>
-          <a:bodyPr wrap="square" anchor="t">
-            <a:spAutoFit/>
-          </a:bodyPr>
-          <a:lstStyle/>
-          <a:p>
-            <a:pPr algn="l"/>
-            <a:r>
-              <a:rPr sz="3000" b="1">
-                <a:solidFill>
-                  <a:srgbClr val="F5F3EC"/>
-                </a:solidFill>
-                <a:latin typeface="Arial"/>
-              </a:rPr>
-              <a:t>投影機情報站</a:t>
-            </a:r>
-          </a:p>
-        </p:txBody>
-      </p:sp>
-      <p:sp>
-        <p:nvSpPr>
-          <p:cNvPr id="4" name="TextBox 3"/>
-          <p:cNvSpPr txBox="1"/>
-          <p:nvPr/>
-        </p:nvSpPr>
-        <p:spPr>
-          <a:xfrm>
-            <a:off x="731520" y="3611880"/>
-            <a:ext cx="9144000" cy="457200"/>
-          </a:xfrm>
-          <a:prstGeom prst="rect">
-            <a:avLst/>
-          </a:prstGeom>
-          <a:noFill/>
-        </p:spPr>
-        <p:txBody>
-          <a:bodyPr wrap="square" anchor="t">
-            <a:spAutoFit/>
-          </a:bodyPr>
-          <a:lstStyle/>
-          <a:p>
-            <a:pPr algn="l"/>
-            <a:r>
-              <a:rPr sz="1400" b="0">
-                <a:solidFill>
-                  <a:srgbClr val="9096A1"/>
-                </a:solidFill>
-                <a:latin typeface="Arial"/>
-              </a:rPr>
-              <a:t>由本站爬蟲每日追蹤產業動態，AI 自動摘要與分類</a:t>
-            </a:r>
-          </a:p>
-        </p:txBody>
-      </p:sp>
-      <p:sp>
-        <p:nvSpPr>
-          <p:cNvPr id="5" name="TextBox 4"/>
-          <p:cNvSpPr txBox="1"/>
-          <p:nvPr/>
-        </p:nvSpPr>
-        <p:spPr>
-          <a:xfrm>
-            <a:off x="11430000" y="6446520"/>
-            <a:ext cx="548640" cy="274320"/>
-          </a:xfrm>
-          <a:prstGeom prst="rect">
-            <a:avLst/>
-          </a:prstGeom>
-          <a:noFill/>
-        </p:spPr>
-        <p:txBody>
-          <a:bodyPr wrap="square" anchor="t">
-            <a:spAutoFit/>
-          </a:bodyPr>
-          <a:lstStyle/>
-          <a:p>
-            <a:pPr algn="r"/>
-            <a:r>
-              <a:rPr sz="1000" b="0">
-                <a:solidFill>
-                  <a:srgbClr val="9096A1"/>
-                </a:solidFill>
-                <a:latin typeface="Arial"/>
-              </a:rPr>
-              <a:t>07</a:t>
             </a:r>
           </a:p>
         </p:txBody>
